--- a/10-Knowledge-Products/KP1-GEA/videos/module_3/en/decks/KP1_M3_3.2_Deck_v0.2.pptx
+++ b/10-Knowledge-Products/KP1-GEA/videos/module_3/en/decks/KP1_M3_3.2_Deck_v0.2.pptx
@@ -14,14 +14,14 @@
     <p:handoutMasterId r:id="rId47"/>
   </p:handoutMasterIdLst>
   <p:sldIdLst>
-    <p:sldId id="2681" r:id="rId8"/>
-    <p:sldId id="2704" r:id="rId26"/>
     <p:sldId id="2705" r:id="rId27"/>
     <p:sldId id="2706" r:id="rId28"/>
     <p:sldId id="2707" r:id="rId29"/>
     <p:sldId id="2708" r:id="rId30"/>
     <p:sldId id="2709" r:id="rId31"/>
     <p:sldId id="2710" r:id="rId32"/>
+    <p:sldId id="2711" r:id="rId33"/>
+    <p:sldId id="2712" r:id="rId34"/>
   </p:sldIdLst>
   <p:sldSz cx="12192000" cy="6858000"/>
   <p:notesSz cx="6858000" cy="9144000"/>
@@ -888,76 +888,6 @@
 </p:notesMaster>
 </file>
 
-<file path=ppt/notesSlides/notesSlide11.xml><?xml version="1.0" encoding="utf-8"?>
-<p:notes xmlns:a="http://schemas.openxmlformats.org/drawingml/2006/main" xmlns:p="http://schemas.openxmlformats.org/presentationml/2006/main" xmlns:r="http://schemas.openxmlformats.org/officeDocument/2006/relationships">
-  <p:cSld>
-    <p:spTree>
-      <p:nvGrpSpPr>
-        <p:cNvPr id="1" name=""/>
-        <p:cNvGrpSpPr/>
-        <p:nvPr/>
-      </p:nvGrpSpPr>
-      <p:grpSpPr>
-        <a:xfrm>
-          <a:off x="0" y="0"/>
-          <a:ext cx="0" cy="0"/>
-          <a:chOff x="0" y="0"/>
-          <a:chExt cx="0" cy="0"/>
-        </a:xfrm>
-      </p:grpSpPr>
-      <p:sp>
-        <p:nvSpPr>
-          <p:cNvPr id="2" name="Slide Image Placeholder 1"/>
-          <p:cNvSpPr>
-            <a:spLocks noGrp="1"/>
-          </p:cNvSpPr>
-          <p:nvPr>
-            <p:ph type="sldImg" idx="2"/>
-          </p:nvPr>
-        </p:nvSpPr>
-        <p:spPr/>
-      </p:sp>
-      <p:sp>
-        <p:nvSpPr>
-          <p:cNvPr id="3" name="Notes Placeholder 2"/>
-          <p:cNvSpPr>
-            <a:spLocks noGrp="1"/>
-          </p:cNvSpPr>
-          <p:nvPr>
-            <p:ph type="body" idx="3" sz="quarter"/>
-          </p:nvPr>
-        </p:nvSpPr>
-        <p:spPr/>
-        <p:txBody>
-          <a:bodyPr/>
-          <a:lstStyle/>
-          <a:p>
-            <a:r>
-              <a:t>VO, slide 1: At some point a spreadsheet stops coping — hundreds of entities, several sectors, relationships you cannot see in rows and columns. Here is the danger: in buying a tool to help your government avoid vendor lock-in, you can lock yourself into the tool.</a:t>
-            </a:r>
-          </a:p>
-        </p:txBody>
-      </p:sp>
-      <p:sp>
-        <p:nvSpPr>
-          <p:cNvPr id="4" name="Slide Number Placeholder 3"/>
-          <p:cNvSpPr>
-            <a:spLocks noGrp="1"/>
-          </p:cNvSpPr>
-          <p:nvPr>
-            <p:ph type="sldNum" idx="5" sz="quarter"/>
-          </p:nvPr>
-        </p:nvSpPr>
-        <p:spPr/>
-      </p:sp>
-    </p:spTree>
-  </p:cSld>
-  <p:clrMapOvr>
-    <a:masterClrMapping/>
-  </p:clrMapOvr>
-</p:notes>
-</file>
-
 <file path=ppt/notesSlides/notesSlide12.xml><?xml version="1.0" encoding="utf-8"?>
 <p:notes xmlns:a="http://schemas.openxmlformats.org/drawingml/2006/main" xmlns:p="http://schemas.openxmlformats.org/presentationml/2006/main" xmlns:r="http://schemas.openxmlformats.org/officeDocument/2006/relationships">
   <p:cSld>
@@ -1003,7 +933,7 @@
           <a:lstStyle/>
           <a:p>
             <a:r>
-              <a:t>VO: First, know when to graduate. The signs: you cannot see the relationships any more, because they are scattered across tabs. Several people edit and their changes collide. You cannot answer a simple cross-layer question — which systems touch the Person domain — without an afternoon of manual work. When the spreadsheet hurts in these specific ways, graduate. Not before. Buying a heavy tool too early just gives you an empty, expensive database.</a:t>
+              <a:t>Title card — the cold open. The hosts name the module, the video number, the title and the single message on this slide; no scripted narration. Hold until the opener begins; the opener is narrated on the next slide.</a:t>
             </a:r>
           </a:p>
         </p:txBody>
@@ -1073,7 +1003,7 @@
           <a:lstStyle/>
           <a:p>
             <a:r>
-              <a:t>VO: Then apply the same sourcing rule you apply to every system — reuse before buy, buy before build. Is there already a shared tooling platform your government runs that you can use? Is there an open-source EA tool that fits? Only then a bought product. Building your own EA tool is almost never right — it is the most bespoke choice for a problem many others have already solved. The rule you enforce on every ministry's project applies to your own tool too.</a:t>
+              <a:t>VO: At some point a spreadsheet stops coping — hundreds of entities, several sectors, relationships you cannot see in rows and columns. Here is the danger: in buying a tool to help your government avoid vendor lock-in, you can lock yourself into the tool.</a:t>
             </a:r>
           </a:p>
         </p:txBody>
@@ -1143,13 +1073,7 @@
           <a:lstStyle/>
           <a:p>
             <a:r>
-              <a:t>VO: The single most important rule: keep your architecture content in an open format you control. Before you adopt any tool, ask one question — can I export everything, in a format I can read without this tool, whenever I want? If the answer is no, the tool owns your architecture, not you. The content — the layers, the relationships, the decisions — is the asset. The tool is just a viewer. You must be able to change the viewer without losing the asset.</a:t>
-            </a:r>
-          </a:p>
-          <a:p/>
-          <a:p>
-            <a:r>
-              <a:t>The operative beat of the video. Hold the export question a beat longer than feels comfortable.</a:t>
+              <a:t>VO: First, know when to graduate. The signs: you cannot see the relationships any more, because they are scattered across tabs. Several people edit and their changes collide. You cannot answer a simple cross-layer question — which systems touch the Person domain — without an afternoon of manual work. When the spreadsheet hurts in these specific ways, graduate. Not before. Buying a heavy tool too early just gives you an empty, expensive database.</a:t>
             </a:r>
           </a:p>
         </p:txBody>
@@ -1219,7 +1143,7 @@
           <a:lstStyle/>
           <a:p>
             <a:r>
-              <a:t>VO: One more trap. Every EA tool ships with its own built-in way of organising things — its own metamodel. The mistake is to let the tool's model quietly replace the one you adopted. You bend the tool to fit your entities and your principles — not the other way around. If a tool cannot represent your metamodel, that is a reason to question the tool, not to change your metamodel. The architecture is the content and the model. The tool serves them.</a:t>
+              <a:t>VO: Then apply the same sourcing rule you apply to every system — reuse before buy, buy before build. Is there already a shared tooling platform your government runs that you can use? Is there an open-source EA tool that fits? Only then a bought product. Building your own EA tool is almost never right — it is the most bespoke choice for a problem many others have already solved. The rule you enforce on every ministry's project applies to your own tool too.</a:t>
             </a:r>
           </a:p>
         </p:txBody>
@@ -1289,13 +1213,13 @@
           <a:lstStyle/>
           <a:p>
             <a:r>
-              <a:t>PRACTICE BOX (on-screen only — never read it, never paraphrase it, never point at it). It replaces the narrated handoff: this video ends on the recap and the Sources slide.</a:t>
+              <a:t>VO: The single most important rule: keep your architecture content in an open format you control. Before you adopt any tool, ask one question — can I export everything, in a format I can read without this tool, whenever I want? If the answer is no, the tool owns your architecture, not you. The content — the layers, the relationships, the decisions — is the asset. The tool is just a viewer. You must be able to change the viewer without losing the asset.</a:t>
             </a:r>
           </a:p>
           <a:p/>
           <a:p>
             <a:r>
-              <a:t>VO: Choose your tooling like any government system: graduate when the spreadsheet truly hurts, reuse before buy, buy before build, keep your content in open formats you control, and bend the tool to your metamodel.</a:t>
+              <a:t>The operative beat of the video. Hold the export question a beat longer than feels comfortable.</a:t>
             </a:r>
           </a:p>
         </p:txBody>
@@ -1365,7 +1289,7 @@
           <a:lstStyle/>
           <a:p>
             <a:r>
-              <a:t>Sources slide, held ~5 seconds at the end of the video. Links are compiled into the YouTube description per ITU convention; no URLs read aloud.</a:t>
+              <a:t>VO: One more trap. Every EA tool ships with its own built-in way of organising things — its own metamodel. The mistake is to let the tool's model quietly replace the one you adopted. You bend the tool to fit your entities and your principles — not the other way around. If a tool cannot represent your metamodel, that is a reason to question the tool, not to change your metamodel. The architecture is the content and the model. The tool serves them.</a:t>
             </a:r>
           </a:p>
         </p:txBody>
@@ -1390,7 +1314,7 @@
 </p:notes>
 </file>
 
-<file path=ppt/notesSlides/notesSlide21.xml><?xml version="1.0" encoding="utf-8"?>
+<file path=ppt/notesSlides/notesSlide18.xml><?xml version="1.0" encoding="utf-8"?>
 <p:notes xmlns:a="http://schemas.openxmlformats.org/drawingml/2006/main" xmlns:p="http://schemas.openxmlformats.org/presentationml/2006/main" xmlns:r="http://schemas.openxmlformats.org/officeDocument/2006/relationships">
   <p:cSld>
     <p:spTree>
@@ -1435,7 +1359,83 @@
           <a:lstStyle/>
           <a:p>
             <a:r>
-              <a:t>Title card for standalone video 3.2. Content slides are identical to the corresponding section of the combined deck KP1_M3_Deck_v0.2.pptx; voice-over is in each slide’s notes.</a:t>
+              <a:t>PRACTICE BOX (on-screen only — never read it, never paraphrase it, never point at it). It replaces the narrated handoff: this video ends on the recap and the Sources slide.</a:t>
+            </a:r>
+          </a:p>
+          <a:p/>
+          <a:p>
+            <a:r>
+              <a:t>VO: Choose your tooling like any government system: graduate when the spreadsheet truly hurts, reuse before buy, buy before build, keep your content in open formats you control, and bend the tool to your metamodel.</a:t>
+            </a:r>
+          </a:p>
+        </p:txBody>
+      </p:sp>
+      <p:sp>
+        <p:nvSpPr>
+          <p:cNvPr id="4" name="Slide Number Placeholder 3"/>
+          <p:cNvSpPr>
+            <a:spLocks noGrp="1"/>
+          </p:cNvSpPr>
+          <p:nvPr>
+            <p:ph type="sldNum" idx="5" sz="quarter"/>
+          </p:nvPr>
+        </p:nvSpPr>
+        <p:spPr/>
+      </p:sp>
+    </p:spTree>
+  </p:cSld>
+  <p:clrMapOvr>
+    <a:masterClrMapping/>
+  </p:clrMapOvr>
+</p:notes>
+</file>
+
+<file path=ppt/notesSlides/notesSlide19.xml><?xml version="1.0" encoding="utf-8"?>
+<p:notes xmlns:a="http://schemas.openxmlformats.org/drawingml/2006/main" xmlns:p="http://schemas.openxmlformats.org/presentationml/2006/main" xmlns:r="http://schemas.openxmlformats.org/officeDocument/2006/relationships">
+  <p:cSld>
+    <p:spTree>
+      <p:nvGrpSpPr>
+        <p:cNvPr id="1" name=""/>
+        <p:cNvGrpSpPr/>
+        <p:nvPr/>
+      </p:nvGrpSpPr>
+      <p:grpSpPr>
+        <a:xfrm>
+          <a:off x="0" y="0"/>
+          <a:ext cx="0" cy="0"/>
+          <a:chOff x="0" y="0"/>
+          <a:chExt cx="0" cy="0"/>
+        </a:xfrm>
+      </p:grpSpPr>
+      <p:sp>
+        <p:nvSpPr>
+          <p:cNvPr id="2" name="Slide Image Placeholder 1"/>
+          <p:cNvSpPr>
+            <a:spLocks noGrp="1"/>
+          </p:cNvSpPr>
+          <p:nvPr>
+            <p:ph type="sldImg" idx="2"/>
+          </p:nvPr>
+        </p:nvSpPr>
+        <p:spPr/>
+      </p:sp>
+      <p:sp>
+        <p:nvSpPr>
+          <p:cNvPr id="3" name="Notes Placeholder 2"/>
+          <p:cNvSpPr>
+            <a:spLocks noGrp="1"/>
+          </p:cNvSpPr>
+          <p:nvPr>
+            <p:ph type="body" idx="3" sz="quarter"/>
+          </p:nvPr>
+        </p:nvSpPr>
+        <p:spPr/>
+        <p:txBody>
+          <a:bodyPr/>
+          <a:lstStyle/>
+          <a:p>
+            <a:r>
+              <a:t>Sources slide, held ~5 seconds at the end of the video. Links are compiled into the YouTube description per ITU convention; no URLs read aloud.</a:t>
             </a:r>
           </a:p>
         </p:txBody>
@@ -11596,851 +11596,6 @@
 </p:sldMaster>
 </file>
 
-<file path=ppt/slides/slide1.xml><?xml version="1.0" encoding="utf-8"?>
-<p:sld xmlns:a="http://schemas.openxmlformats.org/drawingml/2006/main" xmlns:r="http://schemas.openxmlformats.org/officeDocument/2006/relationships" xmlns:p="http://schemas.openxmlformats.org/presentationml/2006/main">
-  <p:cSld>
-    <p:spTree>
-      <p:nvGrpSpPr>
-        <p:cNvPr id="1" name=""/>
-        <p:cNvGrpSpPr/>
-        <p:nvPr/>
-      </p:nvGrpSpPr>
-      <p:grpSpPr>
-        <a:xfrm>
-          <a:off x="0" y="0"/>
-          <a:ext cx="0" cy="0"/>
-          <a:chOff x="0" y="0"/>
-          <a:chExt cx="0" cy="0"/>
-        </a:xfrm>
-      </p:grpSpPr>
-      <p:cxnSp>
-        <p:nvCxnSpPr>
-          <p:cNvPr id="11" name="Straight Connector 10">
-            <a:extLst>
-              <a:ext uri="{FF2B5EF4-FFF2-40B4-BE49-F238E27FC236}">
-                <a16:creationId xmlns:a16="http://schemas.microsoft.com/office/drawing/2014/main" id="{D9AD66F2-F7C0-4D03-9150-D28F17AC561D}"/>
-              </a:ext>
-            </a:extLst>
-          </p:cNvPr>
-          <p:cNvCxnSpPr>
-            <a:cxnSpLocks/>
-          </p:cNvCxnSpPr>
-          <p:nvPr/>
-        </p:nvCxnSpPr>
-        <p:spPr>
-          <a:xfrm>
-            <a:off x="373021" y="2198718"/>
-            <a:ext cx="6843567" cy="0"/>
-          </a:xfrm>
-          <a:prstGeom prst="line">
-            <a:avLst/>
-          </a:prstGeom>
-          <a:ln w="12700">
-            <a:solidFill>
-              <a:srgbClr val="009CD6"/>
-            </a:solidFill>
-          </a:ln>
-        </p:spPr>
-        <p:style>
-          <a:lnRef idx="1">
-            <a:schemeClr val="accent1"/>
-          </a:lnRef>
-          <a:fillRef idx="0">
-            <a:schemeClr val="accent1"/>
-          </a:fillRef>
-          <a:effectRef idx="0">
-            <a:schemeClr val="accent1"/>
-          </a:effectRef>
-          <a:fontRef idx="minor">
-            <a:schemeClr val="tx1"/>
-          </a:fontRef>
-        </p:style>
-      </p:cxnSp>
-      <p:sp>
-        <p:nvSpPr>
-          <p:cNvPr id="12" name="Title 9">
-            <a:extLst>
-              <a:ext uri="{FF2B5EF4-FFF2-40B4-BE49-F238E27FC236}">
-                <a16:creationId xmlns:a16="http://schemas.microsoft.com/office/drawing/2014/main" id="{EEB08032-CE0E-4986-AEDF-A41026C0E8B9}"/>
-              </a:ext>
-            </a:extLst>
-          </p:cNvPr>
-          <p:cNvSpPr txBox="1">
-            <a:spLocks/>
-          </p:cNvSpPr>
-          <p:nvPr/>
-        </p:nvSpPr>
-        <p:spPr>
-          <a:xfrm>
-            <a:off x="237734" y="702833"/>
-            <a:ext cx="6432007" cy="1218817"/>
-          </a:xfrm>
-          <a:prstGeom prst="rect">
-            <a:avLst/>
-          </a:prstGeom>
-        </p:spPr>
-        <p:txBody>
-          <a:bodyPr anchor="b">
-            <a:noAutofit/>
-          </a:bodyPr>
-          <a:lstStyle>
-            <a:lvl1pPr algn="l" defTabSz="914400" rtl="0" eaLnBrk="1" latinLnBrk="0" hangingPunct="1">
-              <a:lnSpc>
-                <a:spcPct val="90000"/>
-              </a:lnSpc>
-              <a:spcBef>
-                <a:spcPct val="0"/>
-              </a:spcBef>
-              <a:buNone/>
-              <a:defRPr sz="4000" kern="1200">
-                <a:solidFill>
-                  <a:schemeClr val="bg1"/>
-                </a:solidFill>
-                <a:latin typeface="Arial" panose="020B0604020202020204" pitchFamily="34" charset="0"/>
-                <a:ea typeface="+mj-ea"/>
-                <a:cs typeface="Arial" panose="020B0604020202020204" pitchFamily="34" charset="0"/>
-              </a:defRPr>
-            </a:lvl1pPr>
-          </a:lstStyle>
-          <a:p>
-            <a:r>
-              <a:rPr sz="2400" b="1" i="0">
-                <a:solidFill>
-                  <a:srgbClr val="1A1A1A"/>
-                </a:solidFill>
-                <a:latin typeface="Arial"/>
-              </a:rPr>
-              <a:t>3.2 — Choose EA tooling without locking yourself in</a:t>
-            </a:r>
-          </a:p>
-        </p:txBody>
-      </p:sp>
-      <p:pic>
-        <p:nvPicPr>
-          <p:cNvPr id="7" name="Picture 6">
-            <a:extLst>
-              <a:ext uri="{FF2B5EF4-FFF2-40B4-BE49-F238E27FC236}">
-                <a16:creationId xmlns:a16="http://schemas.microsoft.com/office/drawing/2014/main" id="{A2066351-C569-4C4C-A096-308777FCDC32}"/>
-              </a:ext>
-            </a:extLst>
-          </p:cNvPr>
-          <p:cNvPicPr>
-            <a:picLocks noChangeAspect="1"/>
-          </p:cNvPicPr>
-          <p:nvPr/>
-        </p:nvPicPr>
-        <p:blipFill>
-          <a:blip r:embed="rId2">
-            <a:extLst>
-              <a:ext uri="{28A0092B-C50C-407E-A947-70E740481C1C}">
-                <a14:useLocalDpi xmlns:a14="http://schemas.microsoft.com/office/drawing/2010/main" val="0"/>
-              </a:ext>
-            </a:extLst>
-          </a:blip>
-          <a:srcRect t="20219" b="14729"/>
-          <a:stretch>
-            <a:fillRect/>
-          </a:stretch>
-        </p:blipFill>
-        <p:spPr>
-          <a:xfrm>
-            <a:off x="0" y="5620871"/>
-            <a:ext cx="1323975" cy="1218816"/>
-          </a:xfrm>
-          <a:prstGeom prst="rect">
-            <a:avLst/>
-          </a:prstGeom>
-        </p:spPr>
-      </p:pic>
-      <p:sp>
-        <p:nvSpPr>
-          <p:cNvPr id="14" name="Title 9">
-            <a:extLst>
-              <a:ext uri="{FF2B5EF4-FFF2-40B4-BE49-F238E27FC236}">
-                <a16:creationId xmlns:a16="http://schemas.microsoft.com/office/drawing/2014/main" id="{B5087B80-3EE4-1881-0130-ED58CA625092}"/>
-              </a:ext>
-            </a:extLst>
-          </p:cNvPr>
-          <p:cNvSpPr txBox="1">
-            <a:spLocks/>
-          </p:cNvSpPr>
-          <p:nvPr/>
-        </p:nvSpPr>
-        <p:spPr>
-          <a:xfrm>
-            <a:off x="284452" y="2475786"/>
-            <a:ext cx="6382893" cy="953213"/>
-          </a:xfrm>
-          <a:prstGeom prst="rect">
-            <a:avLst/>
-          </a:prstGeom>
-        </p:spPr>
-        <p:txBody>
-          <a:bodyPr anchor="t">
-            <a:noAutofit/>
-          </a:bodyPr>
-          <a:lstStyle>
-            <a:lvl1pPr algn="l" defTabSz="914400" rtl="0" eaLnBrk="1" latinLnBrk="0" hangingPunct="1">
-              <a:lnSpc>
-                <a:spcPct val="90000"/>
-              </a:lnSpc>
-              <a:spcBef>
-                <a:spcPct val="0"/>
-              </a:spcBef>
-              <a:buNone/>
-              <a:defRPr sz="4000" kern="1200">
-                <a:solidFill>
-                  <a:schemeClr val="bg1"/>
-                </a:solidFill>
-                <a:latin typeface="Arial" panose="020B0604020202020204" pitchFamily="34" charset="0"/>
-                <a:ea typeface="+mj-ea"/>
-                <a:cs typeface="Arial" panose="020B0604020202020204" pitchFamily="34" charset="0"/>
-              </a:defRPr>
-            </a:lvl1pPr>
-          </a:lstStyle>
-          <a:p>
-            <a:pPr marL="0" marR="0" lvl="0" indent="0" rtl="0">
-              <a:spcBef>
-                <a:spcPts val="600"/>
-              </a:spcBef>
-              <a:spcAft>
-                <a:spcPts val="0"/>
-              </a:spcAft>
-              <a:buNone/>
-            </a:pPr>
-            <a:r>
-              <a:rPr sz="1300" b="1" i="0">
-                <a:solidFill>
-                  <a:srgbClr val="006E96"/>
-                </a:solidFill>
-                <a:latin typeface="Arial"/>
-              </a:rPr>
-              <a:t>KP1 · Government Enterprise Architecture · Module 3 · Video 3.2</a:t>
-            </a:r>
-          </a:p>
-          <a:p>
-            <a:r>
-              <a:rPr sz="1200" b="0" i="1">
-                <a:solidFill>
-                  <a:srgbClr val="595959"/>
-                </a:solidFill>
-                <a:latin typeface="Arial"/>
-              </a:rPr>
-              <a:t>Choose your EA tooling the way you would choose any system — reuse before buy, buy before build, keep your data in open formats you control, and never let the EA tool itself become the vendor trap it is meant to help you avoid.</a:t>
-            </a:r>
-          </a:p>
-        </p:txBody>
-      </p:sp>
-      <p:sp>
-        <p:nvSpPr>
-          <p:cNvPr id="17" name="Title 9">
-            <a:extLst>
-              <a:ext uri="{FF2B5EF4-FFF2-40B4-BE49-F238E27FC236}">
-                <a16:creationId xmlns:a16="http://schemas.microsoft.com/office/drawing/2014/main" id="{5E8796F7-DD26-D250-5E97-B38B22298E72}"/>
-              </a:ext>
-            </a:extLst>
-          </p:cNvPr>
-          <p:cNvSpPr txBox="1">
-            <a:spLocks/>
-          </p:cNvSpPr>
-          <p:nvPr/>
-        </p:nvSpPr>
-        <p:spPr>
-          <a:xfrm>
-            <a:off x="284452" y="4363897"/>
-            <a:ext cx="6382893" cy="953213"/>
-          </a:xfrm>
-          <a:prstGeom prst="rect">
-            <a:avLst/>
-          </a:prstGeom>
-        </p:spPr>
-        <p:txBody>
-          <a:bodyPr anchor="t">
-            <a:noAutofit/>
-          </a:bodyPr>
-          <a:lstStyle>
-            <a:lvl1pPr algn="l" defTabSz="914400" rtl="0" eaLnBrk="1" latinLnBrk="0" hangingPunct="1">
-              <a:lnSpc>
-                <a:spcPct val="90000"/>
-              </a:lnSpc>
-              <a:spcBef>
-                <a:spcPct val="0"/>
-              </a:spcBef>
-              <a:buNone/>
-              <a:defRPr sz="4000" kern="1200">
-                <a:solidFill>
-                  <a:schemeClr val="bg1"/>
-                </a:solidFill>
-                <a:latin typeface="Arial" panose="020B0604020202020204" pitchFamily="34" charset="0"/>
-                <a:ea typeface="+mj-ea"/>
-                <a:cs typeface="Arial" panose="020B0604020202020204" pitchFamily="34" charset="0"/>
-              </a:defRPr>
-            </a:lvl1pPr>
-          </a:lstStyle>
-          <a:p>
-            <a:pPr marL="0" marR="0" lvl="0" indent="0" rtl="0">
-              <a:spcBef>
-                <a:spcPts val="600"/>
-              </a:spcBef>
-              <a:spcAft>
-                <a:spcPts val="1200"/>
-              </a:spcAft>
-              <a:buNone/>
-            </a:pPr>
-            <a:r>
-              <a:rPr sz="1400" b="1" i="0">
-                <a:solidFill>
-                  <a:srgbClr val="1A1A1A"/>
-                </a:solidFill>
-                <a:latin typeface="Arial"/>
-              </a:rPr>
-              <a:t>Target audience: </a:t>
-            </a:r>
-            <a:r>
-              <a:rPr sz="1400" b="0" i="0">
-                <a:solidFill>
-                  <a:srgbClr val="1A1A1A"/>
-                </a:solidFill>
-                <a:latin typeface="Arial"/>
-              </a:rPr>
-              <a:t>Chief architect · senior architect · sector ICT lead</a:t>
-            </a:r>
-          </a:p>
-        </p:txBody>
-      </p:sp>
-      <p:sp>
-        <p:nvSpPr>
-          <p:cNvPr id="18" name="Rectangle 17"/>
-          <p:cNvSpPr/>
-          <p:nvPr/>
-        </p:nvSpPr>
-        <p:spPr>
-          <a:xfrm>
-            <a:off x="7022592" y="0"/>
-            <a:ext cx="5169103" cy="6858000"/>
-          </a:xfrm>
-          <a:prstGeom prst="rect">
-            <a:avLst/>
-          </a:prstGeom>
-          <a:solidFill>
-            <a:srgbClr val="009CD6"/>
-          </a:solidFill>
-          <a:ln>
-            <a:noFill/>
-          </a:ln>
-          <a:effectLst/>
-        </p:spPr>
-        <p:style>
-          <a:lnRef idx="1">
-            <a:schemeClr val="accent1"/>
-          </a:lnRef>
-          <a:fillRef idx="3">
-            <a:schemeClr val="accent1"/>
-          </a:fillRef>
-          <a:effectRef idx="2">
-            <a:schemeClr val="accent1"/>
-          </a:effectRef>
-          <a:fontRef idx="minor">
-            <a:schemeClr val="lt1"/>
-          </a:fontRef>
-        </p:style>
-        <p:txBody>
-          <a:bodyPr rtlCol="0" anchor="ctr"/>
-          <a:lstStyle/>
-          <a:p>
-            <a:pPr algn="ctr"/>
-          </a:p>
-        </p:txBody>
-      </p:sp>
-      <p:sp>
-        <p:nvSpPr>
-          <p:cNvPr id="19" name="TextBox 18"/>
-          <p:cNvSpPr txBox="1"/>
-          <p:nvPr/>
-        </p:nvSpPr>
-        <p:spPr>
-          <a:xfrm>
-            <a:off x="7452360" y="457200"/>
-            <a:ext cx="4297680" cy="457200"/>
-          </a:xfrm>
-          <a:prstGeom prst="rect">
-            <a:avLst/>
-          </a:prstGeom>
-          <a:noFill/>
-        </p:spPr>
-        <p:txBody>
-          <a:bodyPr wrap="square">
-            <a:spAutoFit/>
-          </a:bodyPr>
-          <a:lstStyle/>
-          <a:p>
-            <a:r>
-              <a:rPr sz="1100" b="1" i="0">
-                <a:solidFill>
-                  <a:srgbClr val="E5F5FB"/>
-                </a:solidFill>
-                <a:latin typeface="Arial"/>
-              </a:rPr>
-              <a:t>THE PRACTICE THIS MODULE STANDS UP</a:t>
-            </a:r>
-          </a:p>
-        </p:txBody>
-      </p:sp>
-      <p:sp>
-        <p:nvSpPr>
-          <p:cNvPr id="20" name="Rounded Rectangle 19"/>
-          <p:cNvSpPr/>
-          <p:nvPr/>
-        </p:nvSpPr>
-        <p:spPr>
-          <a:xfrm>
-            <a:off x="7452360" y="960120"/>
-            <a:ext cx="3840480" cy="658368"/>
-          </a:xfrm>
-          <a:prstGeom prst="roundRect">
-            <a:avLst>
-              <a:gd name="adj" fmla="val 14000"/>
-            </a:avLst>
-          </a:prstGeom>
-          <a:solidFill>
-            <a:srgbClr val="FFFFFF"/>
-          </a:solidFill>
-          <a:ln>
-            <a:noFill/>
-          </a:ln>
-          <a:effectLst/>
-        </p:spPr>
-        <p:style>
-          <a:lnRef idx="1">
-            <a:schemeClr val="accent1"/>
-          </a:lnRef>
-          <a:fillRef idx="3">
-            <a:schemeClr val="accent1"/>
-          </a:fillRef>
-          <a:effectRef idx="2">
-            <a:schemeClr val="accent1"/>
-          </a:effectRef>
-          <a:fontRef idx="minor">
-            <a:schemeClr val="lt1"/>
-          </a:fontRef>
-        </p:style>
-        <p:txBody>
-          <a:bodyPr rtlCol="0" anchor="ctr" lIns="164592" wrap="square"/>
-          <a:lstStyle/>
-          <a:p>
-            <a:pPr algn="ctr"/>
-            <a:r>
-              <a:rPr sz="1500" b="1" i="0">
-                <a:solidFill>
-                  <a:srgbClr val="1A1A1A"/>
-                </a:solidFill>
-                <a:latin typeface="Arial"/>
-              </a:rPr>
-              <a:t>Repository — where the architecture lives</a:t>
-            </a:r>
-          </a:p>
-        </p:txBody>
-      </p:sp>
-      <p:sp>
-        <p:nvSpPr>
-          <p:cNvPr id="21" name="Rounded Rectangle 20"/>
-          <p:cNvSpPr/>
-          <p:nvPr/>
-        </p:nvSpPr>
-        <p:spPr>
-          <a:xfrm>
-            <a:off x="7452360" y="1892808"/>
-            <a:ext cx="3840480" cy="658368"/>
-          </a:xfrm>
-          <a:prstGeom prst="roundRect">
-            <a:avLst>
-              <a:gd name="adj" fmla="val 14000"/>
-            </a:avLst>
-          </a:prstGeom>
-          <a:solidFill>
-            <a:srgbClr val="FFFFFF"/>
-          </a:solidFill>
-          <a:ln>
-            <a:noFill/>
-          </a:ln>
-          <a:effectLst/>
-        </p:spPr>
-        <p:style>
-          <a:lnRef idx="1">
-            <a:schemeClr val="accent1"/>
-          </a:lnRef>
-          <a:fillRef idx="3">
-            <a:schemeClr val="accent1"/>
-          </a:fillRef>
-          <a:effectRef idx="2">
-            <a:schemeClr val="accent1"/>
-          </a:effectRef>
-          <a:fontRef idx="minor">
-            <a:schemeClr val="lt1"/>
-          </a:fontRef>
-        </p:style>
-        <p:txBody>
-          <a:bodyPr rtlCol="0" anchor="ctr" lIns="164592" wrap="square"/>
-          <a:lstStyle/>
-          <a:p>
-            <a:pPr algn="ctr"/>
-            <a:r>
-              <a:rPr sz="1500" b="1" i="0">
-                <a:solidFill>
-                  <a:srgbClr val="1A1A1A"/>
-                </a:solidFill>
-                <a:latin typeface="Arial"/>
-              </a:rPr>
-              <a:t>Tooling — chosen without lock-in</a:t>
-            </a:r>
-          </a:p>
-        </p:txBody>
-      </p:sp>
-      <p:sp>
-        <p:nvSpPr>
-          <p:cNvPr id="22" name="Rounded Rectangle 21"/>
-          <p:cNvSpPr/>
-          <p:nvPr/>
-        </p:nvSpPr>
-        <p:spPr>
-          <a:xfrm>
-            <a:off x="7452360" y="2825496"/>
-            <a:ext cx="3840480" cy="658368"/>
-          </a:xfrm>
-          <a:prstGeom prst="roundRect">
-            <a:avLst>
-              <a:gd name="adj" fmla="val 14000"/>
-            </a:avLst>
-          </a:prstGeom>
-          <a:solidFill>
-            <a:srgbClr val="FFFFFF"/>
-          </a:solidFill>
-          <a:ln>
-            <a:noFill/>
-          </a:ln>
-          <a:effectLst/>
-        </p:spPr>
-        <p:style>
-          <a:lnRef idx="1">
-            <a:schemeClr val="accent1"/>
-          </a:lnRef>
-          <a:fillRef idx="3">
-            <a:schemeClr val="accent1"/>
-          </a:fillRef>
-          <a:effectRef idx="2">
-            <a:schemeClr val="accent1"/>
-          </a:effectRef>
-          <a:fontRef idx="minor">
-            <a:schemeClr val="lt1"/>
-          </a:fontRef>
-        </p:style>
-        <p:txBody>
-          <a:bodyPr rtlCol="0" anchor="ctr" lIns="164592" wrap="square"/>
-          <a:lstStyle/>
-          <a:p>
-            <a:pPr algn="ctr"/>
-            <a:r>
-              <a:rPr sz="1500" b="1" i="0">
-                <a:solidFill>
-                  <a:srgbClr val="1A1A1A"/>
-                </a:solidFill>
-                <a:latin typeface="Arial"/>
-              </a:rPr>
-              <a:t>Governance — a Board and a gate</a:t>
-            </a:r>
-          </a:p>
-        </p:txBody>
-      </p:sp>
-      <p:sp>
-        <p:nvSpPr>
-          <p:cNvPr id="23" name="Rounded Rectangle 22"/>
-          <p:cNvSpPr/>
-          <p:nvPr/>
-        </p:nvSpPr>
-        <p:spPr>
-          <a:xfrm>
-            <a:off x="7452360" y="3758184"/>
-            <a:ext cx="3840480" cy="658368"/>
-          </a:xfrm>
-          <a:prstGeom prst="roundRect">
-            <a:avLst>
-              <a:gd name="adj" fmla="val 14000"/>
-            </a:avLst>
-          </a:prstGeom>
-          <a:solidFill>
-            <a:srgbClr val="006E96"/>
-          </a:solidFill>
-          <a:ln>
-            <a:noFill/>
-          </a:ln>
-          <a:effectLst/>
-        </p:spPr>
-        <p:style>
-          <a:lnRef idx="1">
-            <a:schemeClr val="accent1"/>
-          </a:lnRef>
-          <a:fillRef idx="3">
-            <a:schemeClr val="accent1"/>
-          </a:fillRef>
-          <a:effectRef idx="2">
-            <a:schemeClr val="accent1"/>
-          </a:effectRef>
-          <a:fontRef idx="minor">
-            <a:schemeClr val="lt1"/>
-          </a:fontRef>
-        </p:style>
-        <p:txBody>
-          <a:bodyPr rtlCol="0" anchor="ctr" lIns="164592" wrap="square"/>
-          <a:lstStyle/>
-          <a:p>
-            <a:pPr algn="ctr"/>
-            <a:r>
-              <a:rPr sz="1500" b="1" i="0">
-                <a:solidFill>
-                  <a:srgbClr val="FFFFFF"/>
-                </a:solidFill>
-                <a:latin typeface="Arial"/>
-              </a:rPr>
-              <a:t>Sustainment — alive past year two</a:t>
-            </a:r>
-          </a:p>
-        </p:txBody>
-      </p:sp>
-      <p:sp>
-        <p:nvSpPr>
-          <p:cNvPr id="24" name="TextBox 23"/>
-          <p:cNvSpPr txBox="1"/>
-          <p:nvPr/>
-        </p:nvSpPr>
-        <p:spPr>
-          <a:xfrm>
-            <a:off x="7452360" y="5806440"/>
-            <a:ext cx="4297680" cy="731520"/>
-          </a:xfrm>
-          <a:prstGeom prst="rect">
-            <a:avLst/>
-          </a:prstGeom>
-          <a:noFill/>
-        </p:spPr>
-        <p:txBody>
-          <a:bodyPr wrap="square">
-            <a:spAutoFit/>
-          </a:bodyPr>
-          <a:lstStyle/>
-          <a:p>
-            <a:r>
-              <a:rPr sz="1200" b="0" i="0">
-                <a:solidFill>
-                  <a:srgbClr val="FFFFFF"/>
-                </a:solidFill>
-                <a:latin typeface="Arial"/>
-              </a:rPr>
-              <a:t>5 gate questions · 4 health metrics · 4 ways a practice fades</a:t>
-            </a:r>
-          </a:p>
-        </p:txBody>
-      </p:sp>
-    </p:spTree>
-    <p:extLst>
-      <p:ext uri="{BB962C8B-B14F-4D97-AF65-F5344CB8AC3E}">
-        <p14:creationId xmlns:p14="http://schemas.microsoft.com/office/powerpoint/2010/main" val="1196800265"/>
-      </p:ext>
-    </p:extLst>
-  </p:cSld>
-  <p:clrMapOvr>
-    <a:masterClrMapping/>
-  </p:clrMapOvr>
-</p:sld>
-</file>
-
-<file path=ppt/slides/slide11.xml><?xml version="1.0" encoding="utf-8"?>
-<p:sld xmlns:a="http://schemas.openxmlformats.org/drawingml/2006/main" xmlns:p="http://schemas.openxmlformats.org/presentationml/2006/main" xmlns:r="http://schemas.openxmlformats.org/officeDocument/2006/relationships">
-  <p:cSld>
-    <p:spTree>
-      <p:nvGrpSpPr>
-        <p:cNvPr id="1" name=""/>
-        <p:cNvGrpSpPr/>
-        <p:nvPr/>
-      </p:nvGrpSpPr>
-      <p:grpSpPr/>
-      <p:sp>
-        <p:nvSpPr>
-          <p:cNvPr id="2" name="TextBox 1"/>
-          <p:cNvSpPr txBox="1"/>
-          <p:nvPr/>
-        </p:nvSpPr>
-        <p:spPr>
-          <a:xfrm>
-            <a:off x="822960" y="822960"/>
-            <a:ext cx="7315200" cy="457200"/>
-          </a:xfrm>
-          <a:prstGeom prst="rect">
-            <a:avLst/>
-          </a:prstGeom>
-          <a:noFill/>
-        </p:spPr>
-        <p:txBody>
-          <a:bodyPr wrap="square">
-            <a:spAutoFit/>
-          </a:bodyPr>
-          <a:lstStyle/>
-          <a:p>
-            <a:r>
-              <a:rPr sz="1200" b="1" i="0">
-                <a:solidFill>
-                  <a:srgbClr val="595959"/>
-                </a:solidFill>
-                <a:latin typeface="Arial"/>
-              </a:rPr>
-              <a:t>KP1 · MODULE 3 · VIDEO 3.2</a:t>
-            </a:r>
-          </a:p>
-        </p:txBody>
-      </p:sp>
-      <p:sp>
-        <p:nvSpPr>
-          <p:cNvPr id="3" name="TextBox 2"/>
-          <p:cNvSpPr txBox="1"/>
-          <p:nvPr/>
-        </p:nvSpPr>
-        <p:spPr>
-          <a:xfrm>
-            <a:off x="822960" y="1828800"/>
-            <a:ext cx="2011680" cy="1097280"/>
-          </a:xfrm>
-          <a:prstGeom prst="rect">
-            <a:avLst/>
-          </a:prstGeom>
-          <a:noFill/>
-        </p:spPr>
-        <p:txBody>
-          <a:bodyPr wrap="square">
-            <a:spAutoFit/>
-          </a:bodyPr>
-          <a:lstStyle/>
-          <a:p>
-            <a:r>
-              <a:rPr sz="6000" b="1" i="0">
-                <a:solidFill>
-                  <a:srgbClr val="009CD6"/>
-                </a:solidFill>
-                <a:latin typeface="Arial"/>
-              </a:rPr>
-              <a:t>3.2</a:t>
-            </a:r>
-          </a:p>
-        </p:txBody>
-      </p:sp>
-      <p:sp>
-        <p:nvSpPr>
-          <p:cNvPr id="4" name="TextBox 3"/>
-          <p:cNvSpPr txBox="1"/>
-          <p:nvPr/>
-        </p:nvSpPr>
-        <p:spPr>
-          <a:xfrm>
-            <a:off x="822960" y="2880360"/>
-            <a:ext cx="9601200" cy="1371600"/>
-          </a:xfrm>
-          <a:prstGeom prst="rect">
-            <a:avLst/>
-          </a:prstGeom>
-          <a:noFill/>
-        </p:spPr>
-        <p:txBody>
-          <a:bodyPr wrap="square">
-            <a:spAutoFit/>
-          </a:bodyPr>
-          <a:lstStyle/>
-          <a:p>
-            <a:r>
-              <a:rPr sz="3400" b="1" i="0">
-                <a:solidFill>
-                  <a:srgbClr val="1A1A1A"/>
-                </a:solidFill>
-                <a:latin typeface="Arial"/>
-              </a:rPr>
-              <a:t>Choose EA tooling without locking yourself in</a:t>
-            </a:r>
-          </a:p>
-        </p:txBody>
-      </p:sp>
-      <p:sp>
-        <p:nvSpPr>
-          <p:cNvPr id="5" name="TextBox 4"/>
-          <p:cNvSpPr txBox="1"/>
-          <p:nvPr/>
-        </p:nvSpPr>
-        <p:spPr>
-          <a:xfrm>
-            <a:off x="822960" y="4343400"/>
-            <a:ext cx="9875520" cy="1554480"/>
-          </a:xfrm>
-          <a:prstGeom prst="rect">
-            <a:avLst/>
-          </a:prstGeom>
-          <a:noFill/>
-        </p:spPr>
-        <p:txBody>
-          <a:bodyPr wrap="square">
-            <a:spAutoFit/>
-          </a:bodyPr>
-          <a:lstStyle/>
-          <a:p>
-            <a:r>
-              <a:rPr sz="1700" b="0" i="1">
-                <a:solidFill>
-                  <a:srgbClr val="595959"/>
-                </a:solidFill>
-                <a:latin typeface="Arial"/>
-              </a:rPr>
-              <a:t>Choose your EA tooling the way you would choose any system — reuse before buy, buy before build, keep your data in open formats you control, and never let the EA tool itself become the vendor trap it is meant to help you avoid.</a:t>
-            </a:r>
-          </a:p>
-        </p:txBody>
-      </p:sp>
-      <p:sp>
-        <p:nvSpPr>
-          <p:cNvPr id="6" name="TextBox 5"/>
-          <p:cNvSpPr txBox="1"/>
-          <p:nvPr/>
-        </p:nvSpPr>
-        <p:spPr>
-          <a:xfrm>
-            <a:off x="822960" y="5989320"/>
-            <a:ext cx="7315200" cy="365760"/>
-          </a:xfrm>
-          <a:prstGeom prst="rect">
-            <a:avLst/>
-          </a:prstGeom>
-          <a:noFill/>
-        </p:spPr>
-        <p:txBody>
-          <a:bodyPr wrap="square">
-            <a:spAutoFit/>
-          </a:bodyPr>
-          <a:lstStyle/>
-          <a:p>
-            <a:r>
-              <a:rPr sz="1200" b="0" i="0">
-                <a:solidFill>
-                  <a:srgbClr val="595959"/>
-                </a:solidFill>
-                <a:latin typeface="Arial"/>
-              </a:rPr>
-              <a:t>~4 minutes · standalone video · voice-over on text slides</a:t>
-            </a:r>
-          </a:p>
-        </p:txBody>
-      </p:sp>
-    </p:spTree>
-  </p:cSld>
-  <p:clrMapOvr>
-    <a:masterClrMapping/>
-  </p:clrMapOvr>
-</p:sld>
-</file>
-
 <file path=ppt/slides/slide12.xml><?xml version="1.0" encoding="utf-8"?>
 <p:sld xmlns:a="http://schemas.openxmlformats.org/drawingml/2006/main" xmlns:p="http://schemas.openxmlformats.org/presentationml/2006/main" xmlns:r="http://schemas.openxmlformats.org/officeDocument/2006/relationships">
   <p:cSld>
@@ -12453,58 +11608,14 @@
       <p:grpSpPr/>
       <p:sp>
         <p:nvSpPr>
-          <p:cNvPr id="2" name="Rectangle 1"/>
-          <p:cNvSpPr/>
-          <p:nvPr/>
-        </p:nvSpPr>
-        <p:spPr>
-          <a:xfrm>
-            <a:off x="457200" y="384048"/>
-            <a:ext cx="45720" cy="256032"/>
-          </a:xfrm>
-          <a:prstGeom prst="rect">
-            <a:avLst/>
-          </a:prstGeom>
-          <a:solidFill>
-            <a:srgbClr val="009CD6"/>
-          </a:solidFill>
-          <a:ln>
-            <a:noFill/>
-          </a:ln>
-          <a:effectLst/>
-        </p:spPr>
-        <p:style>
-          <a:lnRef idx="1">
-            <a:schemeClr val="accent1"/>
-          </a:lnRef>
-          <a:fillRef idx="3">
-            <a:schemeClr val="accent1"/>
-          </a:fillRef>
-          <a:effectRef idx="2">
-            <a:schemeClr val="accent1"/>
-          </a:effectRef>
-          <a:fontRef idx="minor">
-            <a:schemeClr val="lt1"/>
-          </a:fontRef>
-        </p:style>
-        <p:txBody>
-          <a:bodyPr rtlCol="0" anchor="ctr"/>
-          <a:lstStyle/>
-          <a:p>
-            <a:pPr algn="ctr"/>
-          </a:p>
-        </p:txBody>
-      </p:sp>
-      <p:sp>
-        <p:nvSpPr>
-          <p:cNvPr id="3" name="TextBox 2"/>
+          <p:cNvPr id="2" name="TextBox 1"/>
           <p:cNvSpPr txBox="1"/>
           <p:nvPr/>
         </p:nvSpPr>
         <p:spPr>
           <a:xfrm>
-            <a:off x="621792" y="274320"/>
-            <a:ext cx="11247120" cy="914400"/>
+            <a:off x="822960" y="822960"/>
+            <a:ext cx="7315200" cy="457200"/>
           </a:xfrm>
           <a:prstGeom prst="rect">
             <a:avLst/>
@@ -12518,66 +11629,81 @@
           <a:lstStyle/>
           <a:p>
             <a:r>
-              <a:rPr sz="2800" b="1" i="0">
+              <a:rPr sz="1200" b="1" i="0">
+                <a:solidFill>
+                  <a:srgbClr val="595959"/>
+                </a:solidFill>
+                <a:latin typeface="Arial"/>
+              </a:rPr>
+              <a:t>KP1 · MODULE 3 · VIDEO 3.2</a:t>
+            </a:r>
+          </a:p>
+        </p:txBody>
+      </p:sp>
+      <p:sp>
+        <p:nvSpPr>
+          <p:cNvPr id="3" name="TextBox 2"/>
+          <p:cNvSpPr txBox="1"/>
+          <p:nvPr/>
+        </p:nvSpPr>
+        <p:spPr>
+          <a:xfrm>
+            <a:off x="822960" y="1828800"/>
+            <a:ext cx="2011680" cy="1097280"/>
+          </a:xfrm>
+          <a:prstGeom prst="rect">
+            <a:avLst/>
+          </a:prstGeom>
+          <a:noFill/>
+        </p:spPr>
+        <p:txBody>
+          <a:bodyPr wrap="square">
+            <a:spAutoFit/>
+          </a:bodyPr>
+          <a:lstStyle/>
+          <a:p>
+            <a:r>
+              <a:rPr sz="6000" b="1" i="0">
+                <a:solidFill>
+                  <a:srgbClr val="009CD6"/>
+                </a:solidFill>
+                <a:latin typeface="Arial"/>
+              </a:rPr>
+              <a:t>3.2</a:t>
+            </a:r>
+          </a:p>
+        </p:txBody>
+      </p:sp>
+      <p:sp>
+        <p:nvSpPr>
+          <p:cNvPr id="4" name="TextBox 3"/>
+          <p:cNvSpPr txBox="1"/>
+          <p:nvPr/>
+        </p:nvSpPr>
+        <p:spPr>
+          <a:xfrm>
+            <a:off x="822960" y="2880360"/>
+            <a:ext cx="9601200" cy="1371600"/>
+          </a:xfrm>
+          <a:prstGeom prst="rect">
+            <a:avLst/>
+          </a:prstGeom>
+          <a:noFill/>
+        </p:spPr>
+        <p:txBody>
+          <a:bodyPr wrap="square">
+            <a:spAutoFit/>
+          </a:bodyPr>
+          <a:lstStyle/>
+          <a:p>
+            <a:r>
+              <a:rPr sz="3400" b="1" i="0">
                 <a:solidFill>
                   <a:srgbClr val="1A1A1A"/>
                 </a:solidFill>
                 <a:latin typeface="Arial"/>
               </a:rPr>
-              <a:t>Graduate when the spreadsheet hurts in three specific ways</a:t>
-            </a:r>
-          </a:p>
-        </p:txBody>
-      </p:sp>
-      <p:sp>
-        <p:nvSpPr>
-          <p:cNvPr id="4" name="Oval 3"/>
-          <p:cNvSpPr/>
-          <p:nvPr/>
-        </p:nvSpPr>
-        <p:spPr>
-          <a:xfrm>
-            <a:off x="621792" y="1508760"/>
-            <a:ext cx="310896" cy="310896"/>
-          </a:xfrm>
-          <a:prstGeom prst="ellipse">
-            <a:avLst/>
-          </a:prstGeom>
-          <a:solidFill>
-            <a:srgbClr val="009CD6"/>
-          </a:solidFill>
-          <a:ln>
-            <a:noFill/>
-          </a:ln>
-          <a:effectLst/>
-        </p:spPr>
-        <p:style>
-          <a:lnRef idx="1">
-            <a:schemeClr val="accent1"/>
-          </a:lnRef>
-          <a:fillRef idx="3">
-            <a:schemeClr val="accent1"/>
-          </a:fillRef>
-          <a:effectRef idx="2">
-            <a:schemeClr val="accent1"/>
-          </a:effectRef>
-          <a:fontRef idx="minor">
-            <a:schemeClr val="lt1"/>
-          </a:fontRef>
-        </p:style>
-        <p:txBody>
-          <a:bodyPr rtlCol="0" anchor="ctr" lIns="0" rIns="0" tIns="0" bIns="0" wrap="square"/>
-          <a:lstStyle/>
-          <a:p>
-            <a:pPr algn="ctr"/>
-            <a:r>
-              <a:rPr sz="1300" b="1" i="0">
-                <a:solidFill>
-                  <a:srgbClr val="FFFFFF"/>
-                </a:solidFill>
-                <a:latin typeface="Arial"/>
-              </a:rPr>
-              <a:t>1</a:t>
+              <a:t>Choose EA tooling without locking yourself in</a:t>
             </a:r>
           </a:p>
         </p:txBody>
@@ -12590,8 +11716,8 @@
         </p:nvSpPr>
         <p:spPr>
           <a:xfrm>
-            <a:off x="1115568" y="1463040"/>
-            <a:ext cx="10527487" cy="1386839"/>
+            <a:off x="822960" y="4343400"/>
+            <a:ext cx="9875520" cy="1554480"/>
           </a:xfrm>
           <a:prstGeom prst="rect">
             <a:avLst/>
@@ -12604,146 +11730,28 @@
           </a:bodyPr>
           <a:lstStyle/>
           <a:p>
-            <a:pPr>
-              <a:spcAft>
-                <a:spcPts val="300"/>
-              </a:spcAft>
-            </a:pPr>
-            <a:r>
-              <a:rPr sz="1900" b="1" i="0">
-                <a:solidFill>
-                  <a:srgbClr val="1A1A1A"/>
-                </a:solidFill>
-                <a:latin typeface="Arial"/>
-              </a:rPr>
-              <a:t>You cannot see the relationships any more</a:t>
-            </a:r>
-          </a:p>
-          <a:p>
-            <a:pPr>
-              <a:spcAft>
-                <a:spcPts val="300"/>
-              </a:spcAft>
-            </a:pPr>
-            <a:r>
-              <a:rPr sz="1550" b="0" i="0">
+            <a:r>
+              <a:rPr sz="1700" b="0" i="1">
                 <a:solidFill>
                   <a:srgbClr val="595959"/>
                 </a:solidFill>
                 <a:latin typeface="Arial"/>
               </a:rPr>
-              <a:t>They are scattered across tabs.</a:t>
-            </a:r>
-          </a:p>
-        </p:txBody>
-      </p:sp>
-      <p:sp>
-        <p:nvSpPr>
-          <p:cNvPr id="6" name="Rectangle 5"/>
-          <p:cNvSpPr/>
-          <p:nvPr/>
-        </p:nvSpPr>
-        <p:spPr>
-          <a:xfrm>
-            <a:off x="621792" y="2854452"/>
-            <a:ext cx="10881360" cy="12700"/>
-          </a:xfrm>
-          <a:prstGeom prst="rect">
-            <a:avLst/>
-          </a:prstGeom>
-          <a:solidFill>
-            <a:srgbClr val="DDECF4"/>
-          </a:solidFill>
-          <a:ln>
-            <a:noFill/>
-          </a:ln>
-          <a:effectLst/>
-        </p:spPr>
-        <p:style>
-          <a:lnRef idx="1">
-            <a:schemeClr val="accent1"/>
-          </a:lnRef>
-          <a:fillRef idx="3">
-            <a:schemeClr val="accent1"/>
-          </a:fillRef>
-          <a:effectRef idx="2">
-            <a:schemeClr val="accent1"/>
-          </a:effectRef>
-          <a:fontRef idx="minor">
-            <a:schemeClr val="lt1"/>
-          </a:fontRef>
-        </p:style>
-        <p:txBody>
-          <a:bodyPr rtlCol="0" anchor="ctr"/>
-          <a:lstStyle/>
-          <a:p>
-            <a:pPr algn="ctr"/>
-          </a:p>
-        </p:txBody>
-      </p:sp>
-      <p:sp>
-        <p:nvSpPr>
-          <p:cNvPr id="7" name="Oval 6"/>
-          <p:cNvSpPr/>
-          <p:nvPr/>
-        </p:nvSpPr>
-        <p:spPr>
-          <a:xfrm>
-            <a:off x="621792" y="2941319"/>
-            <a:ext cx="310896" cy="310896"/>
-          </a:xfrm>
-          <a:prstGeom prst="ellipse">
-            <a:avLst/>
-          </a:prstGeom>
-          <a:solidFill>
-            <a:srgbClr val="009CD6"/>
-          </a:solidFill>
-          <a:ln>
-            <a:noFill/>
-          </a:ln>
-          <a:effectLst/>
-        </p:spPr>
-        <p:style>
-          <a:lnRef idx="1">
-            <a:schemeClr val="accent1"/>
-          </a:lnRef>
-          <a:fillRef idx="3">
-            <a:schemeClr val="accent1"/>
-          </a:fillRef>
-          <a:effectRef idx="2">
-            <a:schemeClr val="accent1"/>
-          </a:effectRef>
-          <a:fontRef idx="minor">
-            <a:schemeClr val="lt1"/>
-          </a:fontRef>
-        </p:style>
-        <p:txBody>
-          <a:bodyPr rtlCol="0" anchor="ctr" lIns="0" rIns="0" tIns="0" bIns="0" wrap="square"/>
-          <a:lstStyle/>
-          <a:p>
-            <a:pPr algn="ctr"/>
-            <a:r>
-              <a:rPr sz="1300" b="1" i="0">
-                <a:solidFill>
-                  <a:srgbClr val="FFFFFF"/>
-                </a:solidFill>
-                <a:latin typeface="Arial"/>
-              </a:rPr>
-              <a:t>2</a:t>
-            </a:r>
-          </a:p>
-        </p:txBody>
-      </p:sp>
-      <p:sp>
-        <p:nvSpPr>
-          <p:cNvPr id="8" name="TextBox 7"/>
+              <a:t>Choose your EA tooling the way you would choose any system — reuse before buy, buy before build, keep your data in open formats you control, and never let the EA tool itself become the vendor trap it is meant to help you avoid.</a:t>
+            </a:r>
+          </a:p>
+        </p:txBody>
+      </p:sp>
+      <p:sp>
+        <p:nvSpPr>
+          <p:cNvPr id="6" name="TextBox 5"/>
           <p:cNvSpPr txBox="1"/>
           <p:nvPr/>
         </p:nvSpPr>
         <p:spPr>
           <a:xfrm>
-            <a:off x="1115568" y="2895600"/>
-            <a:ext cx="10527487" cy="1386839"/>
+            <a:off x="822960" y="5989320"/>
+            <a:ext cx="7315200" cy="365760"/>
           </a:xfrm>
           <a:prstGeom prst="rect">
             <a:avLst/>
@@ -12756,239 +11764,14 @@
           </a:bodyPr>
           <a:lstStyle/>
           <a:p>
-            <a:pPr>
-              <a:spcAft>
-                <a:spcPts val="300"/>
-              </a:spcAft>
-            </a:pPr>
-            <a:r>
-              <a:rPr sz="1900" b="1" i="0">
-                <a:solidFill>
-                  <a:srgbClr val="1A1A1A"/>
-                </a:solidFill>
-                <a:latin typeface="Arial"/>
-              </a:rPr>
-              <a:t>Several people edit, and their changes collide</a:t>
-            </a:r>
-          </a:p>
-        </p:txBody>
-      </p:sp>
-      <p:sp>
-        <p:nvSpPr>
-          <p:cNvPr id="9" name="Rectangle 8"/>
-          <p:cNvSpPr/>
-          <p:nvPr/>
-        </p:nvSpPr>
-        <p:spPr>
-          <a:xfrm>
-            <a:off x="621792" y="4287011"/>
-            <a:ext cx="10881360" cy="12700"/>
-          </a:xfrm>
-          <a:prstGeom prst="rect">
-            <a:avLst/>
-          </a:prstGeom>
-          <a:solidFill>
-            <a:srgbClr val="DDECF4"/>
-          </a:solidFill>
-          <a:ln>
-            <a:noFill/>
-          </a:ln>
-          <a:effectLst/>
-        </p:spPr>
-        <p:style>
-          <a:lnRef idx="1">
-            <a:schemeClr val="accent1"/>
-          </a:lnRef>
-          <a:fillRef idx="3">
-            <a:schemeClr val="accent1"/>
-          </a:fillRef>
-          <a:effectRef idx="2">
-            <a:schemeClr val="accent1"/>
-          </a:effectRef>
-          <a:fontRef idx="minor">
-            <a:schemeClr val="lt1"/>
-          </a:fontRef>
-        </p:style>
-        <p:txBody>
-          <a:bodyPr rtlCol="0" anchor="ctr"/>
-          <a:lstStyle/>
-          <a:p>
-            <a:pPr algn="ctr"/>
-          </a:p>
-        </p:txBody>
-      </p:sp>
-      <p:sp>
-        <p:nvSpPr>
-          <p:cNvPr id="10" name="Oval 9"/>
-          <p:cNvSpPr/>
-          <p:nvPr/>
-        </p:nvSpPr>
-        <p:spPr>
-          <a:xfrm>
-            <a:off x="621792" y="4373879"/>
-            <a:ext cx="310896" cy="310896"/>
-          </a:xfrm>
-          <a:prstGeom prst="ellipse">
-            <a:avLst/>
-          </a:prstGeom>
-          <a:solidFill>
-            <a:srgbClr val="009CD6"/>
-          </a:solidFill>
-          <a:ln>
-            <a:noFill/>
-          </a:ln>
-          <a:effectLst/>
-        </p:spPr>
-        <p:style>
-          <a:lnRef idx="1">
-            <a:schemeClr val="accent1"/>
-          </a:lnRef>
-          <a:fillRef idx="3">
-            <a:schemeClr val="accent1"/>
-          </a:fillRef>
-          <a:effectRef idx="2">
-            <a:schemeClr val="accent1"/>
-          </a:effectRef>
-          <a:fontRef idx="minor">
-            <a:schemeClr val="lt1"/>
-          </a:fontRef>
-        </p:style>
-        <p:txBody>
-          <a:bodyPr rtlCol="0" anchor="ctr" lIns="0" rIns="0" tIns="0" bIns="0" wrap="square"/>
-          <a:lstStyle/>
-          <a:p>
-            <a:pPr algn="ctr"/>
-            <a:r>
-              <a:rPr sz="1300" b="1" i="0">
-                <a:solidFill>
-                  <a:srgbClr val="FFFFFF"/>
-                </a:solidFill>
-                <a:latin typeface="Arial"/>
-              </a:rPr>
-              <a:t>3</a:t>
-            </a:r>
-          </a:p>
-        </p:txBody>
-      </p:sp>
-      <p:sp>
-        <p:nvSpPr>
-          <p:cNvPr id="11" name="TextBox 10"/>
-          <p:cNvSpPr txBox="1"/>
-          <p:nvPr/>
-        </p:nvSpPr>
-        <p:spPr>
-          <a:xfrm>
-            <a:off x="1115568" y="4328159"/>
-            <a:ext cx="10527487" cy="1386839"/>
-          </a:xfrm>
-          <a:prstGeom prst="rect">
-            <a:avLst/>
-          </a:prstGeom>
-          <a:noFill/>
-        </p:spPr>
-        <p:txBody>
-          <a:bodyPr wrap="square">
-            <a:spAutoFit/>
-          </a:bodyPr>
-          <a:lstStyle/>
-          <a:p>
-            <a:pPr>
-              <a:spcAft>
-                <a:spcPts val="300"/>
-              </a:spcAft>
-            </a:pPr>
-            <a:r>
-              <a:rPr sz="1900" b="1" i="0">
-                <a:solidFill>
-                  <a:srgbClr val="1A1A1A"/>
-                </a:solidFill>
-                <a:latin typeface="Arial"/>
-              </a:rPr>
-              <a:t>A simple cross-layer question costs an afternoon</a:t>
-            </a:r>
-          </a:p>
-          <a:p>
-            <a:pPr>
-              <a:spcAft>
-                <a:spcPts val="300"/>
-              </a:spcAft>
-            </a:pPr>
-            <a:r>
-              <a:rPr sz="1550" b="0" i="0">
+            <a:r>
+              <a:rPr sz="1200" b="0" i="0">
                 <a:solidFill>
                   <a:srgbClr val="595959"/>
                 </a:solidFill>
                 <a:latin typeface="Arial"/>
               </a:rPr>
-              <a:t>Which systems touch the Person domain?</a:t>
-            </a:r>
-          </a:p>
-        </p:txBody>
-      </p:sp>
-      <p:sp>
-        <p:nvSpPr>
-          <p:cNvPr id="12" name="TextBox 11"/>
-          <p:cNvSpPr txBox="1"/>
-          <p:nvPr/>
-        </p:nvSpPr>
-        <p:spPr>
-          <a:xfrm>
-            <a:off x="658368" y="5870448"/>
-            <a:ext cx="10881360" cy="548640"/>
-          </a:xfrm>
-          <a:prstGeom prst="rect">
-            <a:avLst/>
-          </a:prstGeom>
-          <a:noFill/>
-        </p:spPr>
-        <p:txBody>
-          <a:bodyPr wrap="square">
-            <a:spAutoFit/>
-          </a:bodyPr>
-          <a:lstStyle/>
-          <a:p>
-            <a:r>
-              <a:rPr sz="1550" b="1" i="0">
-                <a:solidFill>
-                  <a:srgbClr val="006E96"/>
-                </a:solidFill>
-                <a:latin typeface="Arial"/>
-              </a:rPr>
-              <a:t>Then graduate — not before. A heavy tool bought early is an empty, expensive database.</a:t>
-            </a:r>
-          </a:p>
-        </p:txBody>
-      </p:sp>
-      <p:sp>
-        <p:nvSpPr>
-          <p:cNvPr id="13" name="TextBox 12"/>
-          <p:cNvSpPr txBox="1"/>
-          <p:nvPr/>
-        </p:nvSpPr>
-        <p:spPr>
-          <a:xfrm>
-            <a:off x="457200" y="6473952"/>
-            <a:ext cx="7772400" cy="292608"/>
-          </a:xfrm>
-          <a:prstGeom prst="rect">
-            <a:avLst/>
-          </a:prstGeom>
-          <a:noFill/>
-        </p:spPr>
-        <p:txBody>
-          <a:bodyPr wrap="square">
-            <a:spAutoFit/>
-          </a:bodyPr>
-          <a:lstStyle/>
-          <a:p>
-            <a:r>
-              <a:rPr sz="900" b="0" i="0">
-                <a:solidFill>
-                  <a:srgbClr val="595959"/>
-                </a:solidFill>
-                <a:latin typeface="Arial"/>
-              </a:rPr>
-              <a:t>3.2 · Choose EA tooling without locking yourself in</a:t>
+              <a:t>~4 minutes · standalone video · voice-over on text slides</a:t>
             </a:r>
           </a:p>
         </p:txBody>
@@ -13013,58 +11796,14 @@
       <p:grpSpPr/>
       <p:sp>
         <p:nvSpPr>
-          <p:cNvPr id="2" name="Rectangle 1"/>
-          <p:cNvSpPr/>
-          <p:nvPr/>
-        </p:nvSpPr>
-        <p:spPr>
-          <a:xfrm>
-            <a:off x="457200" y="384048"/>
-            <a:ext cx="45720" cy="256032"/>
-          </a:xfrm>
-          <a:prstGeom prst="rect">
-            <a:avLst/>
-          </a:prstGeom>
-          <a:solidFill>
-            <a:srgbClr val="009CD6"/>
-          </a:solidFill>
-          <a:ln>
-            <a:noFill/>
-          </a:ln>
-          <a:effectLst/>
-        </p:spPr>
-        <p:style>
-          <a:lnRef idx="1">
-            <a:schemeClr val="accent1"/>
-          </a:lnRef>
-          <a:fillRef idx="3">
-            <a:schemeClr val="accent1"/>
-          </a:fillRef>
-          <a:effectRef idx="2">
-            <a:schemeClr val="accent1"/>
-          </a:effectRef>
-          <a:fontRef idx="minor">
-            <a:schemeClr val="lt1"/>
-          </a:fontRef>
-        </p:style>
-        <p:txBody>
-          <a:bodyPr rtlCol="0" anchor="ctr"/>
-          <a:lstStyle/>
-          <a:p>
-            <a:pPr algn="ctr"/>
-          </a:p>
-        </p:txBody>
-      </p:sp>
-      <p:sp>
-        <p:nvSpPr>
-          <p:cNvPr id="3" name="TextBox 2"/>
+          <p:cNvPr id="2" name="TextBox 1"/>
           <p:cNvSpPr txBox="1"/>
           <p:nvPr/>
         </p:nvSpPr>
         <p:spPr>
           <a:xfrm>
-            <a:off x="621792" y="274320"/>
-            <a:ext cx="11247120" cy="914400"/>
+            <a:off x="1005840" y="1325880"/>
+            <a:ext cx="5486400" cy="365760"/>
           </a:xfrm>
           <a:prstGeom prst="rect">
             <a:avLst/>
@@ -13078,13 +11817,47 @@
           <a:lstStyle/>
           <a:p>
             <a:r>
-              <a:rPr sz="2800" b="1" i="0">
+              <a:rPr sz="1200" b="1" i="0">
+                <a:solidFill>
+                  <a:srgbClr val="006E96"/>
+                </a:solidFill>
+                <a:latin typeface="Arial"/>
+              </a:rPr>
+              <a:t>WHERE WE START</a:t>
+            </a:r>
+          </a:p>
+        </p:txBody>
+      </p:sp>
+      <p:sp>
+        <p:nvSpPr>
+          <p:cNvPr id="3" name="TextBox 2"/>
+          <p:cNvSpPr txBox="1"/>
+          <p:nvPr/>
+        </p:nvSpPr>
+        <p:spPr>
+          <a:xfrm>
+            <a:off x="1005840" y="1783080"/>
+            <a:ext cx="10149840" cy="1737360"/>
+          </a:xfrm>
+          <a:prstGeom prst="rect">
+            <a:avLst/>
+          </a:prstGeom>
+          <a:noFill/>
+        </p:spPr>
+        <p:txBody>
+          <a:bodyPr wrap="square">
+            <a:spAutoFit/>
+          </a:bodyPr>
+          <a:lstStyle/>
+          <a:p>
+            <a:r>
+              <a:rPr sz="3000" b="1" i="0">
                 <a:solidFill>
                   <a:srgbClr val="1A1A1A"/>
                 </a:solidFill>
                 <a:latin typeface="Arial"/>
               </a:rPr>
-              <a:t>The rule you enforce on every ministry applies to your own tool too</a:t>
+              <a:t>The spreadsheet stops coping. Do not swap one lock-in for another.</a:t>
             </a:r>
           </a:p>
         </p:txBody>
@@ -13097,8 +11870,8 @@
         </p:nvSpPr>
         <p:spPr>
           <a:xfrm>
-            <a:off x="658368" y="1600200"/>
-            <a:ext cx="10881360" cy="2651760"/>
+            <a:off x="1005840" y="3611880"/>
+            <a:ext cx="10149840" cy="2377440"/>
           </a:xfrm>
           <a:prstGeom prst="rect">
             <a:avLst/>
@@ -13113,109 +11886,40 @@
           <a:p>
             <a:pPr>
               <a:spcAft>
-                <a:spcPts val="1200"/>
+                <a:spcPts val="800"/>
               </a:spcAft>
             </a:pPr>
             <a:r>
-              <a:rPr sz="2000" b="0" i="0">
+              <a:rPr sz="1700" b="0" i="0">
                 <a:solidFill>
-                  <a:srgbClr val="1A1A1A"/>
+                  <a:srgbClr val="595959"/>
                 </a:solidFill>
                 <a:latin typeface="Arial"/>
               </a:rPr>
-              <a:t>Reuse before buy, buy before build. Is there already a shared tooling platform your government runs that you can use? Is there an open-source EA tool that fits? Only then a bought product.</a:t>
-            </a:r>
-          </a:p>
-        </p:txBody>
-      </p:sp>
-      <p:sp>
-        <p:nvSpPr>
-          <p:cNvPr id="5" name="Rounded Rectangle 4"/>
-          <p:cNvSpPr/>
-          <p:nvPr/>
-        </p:nvSpPr>
-        <p:spPr>
-          <a:xfrm>
-            <a:off x="658368" y="4434840"/>
-            <a:ext cx="10881360" cy="1325880"/>
-          </a:xfrm>
-          <a:prstGeom prst="roundRect">
-            <a:avLst>
-              <a:gd name="adj" fmla="val 4500"/>
-            </a:avLst>
-          </a:prstGeom>
-          <a:solidFill>
-            <a:srgbClr val="E5F5FB"/>
-          </a:solidFill>
-          <a:ln>
-            <a:noFill/>
-          </a:ln>
-          <a:effectLst/>
-        </p:spPr>
-        <p:style>
-          <a:lnRef idx="1">
-            <a:schemeClr val="accent1"/>
-          </a:lnRef>
-          <a:fillRef idx="3">
-            <a:schemeClr val="accent1"/>
-          </a:fillRef>
-          <a:effectRef idx="2">
-            <a:schemeClr val="accent1"/>
-          </a:effectRef>
-          <a:fontRef idx="minor">
-            <a:schemeClr val="lt1"/>
-          </a:fontRef>
-        </p:style>
-        <p:txBody>
-          <a:bodyPr rtlCol="0" anchor="ctr"/>
-          <a:lstStyle/>
-          <a:p>
-            <a:pPr algn="ctr"/>
-          </a:p>
-        </p:txBody>
-      </p:sp>
-      <p:sp>
-        <p:nvSpPr>
-          <p:cNvPr id="6" name="TextBox 5"/>
-          <p:cNvSpPr txBox="1"/>
-          <p:nvPr/>
-        </p:nvSpPr>
-        <p:spPr>
-          <a:xfrm>
-            <a:off x="859536" y="4626864"/>
-            <a:ext cx="10479024" cy="1051560"/>
-          </a:xfrm>
-          <a:prstGeom prst="rect">
-            <a:avLst/>
-          </a:prstGeom>
-          <a:noFill/>
-        </p:spPr>
-        <p:txBody>
-          <a:bodyPr wrap="square">
-            <a:spAutoFit/>
-          </a:bodyPr>
-          <a:lstStyle/>
+              <a:t>Hundreds of entities, several sectors, relationships you cannot see in rows and columns.</a:t>
+            </a:r>
+          </a:p>
           <a:p>
             <a:pPr>
               <a:spcAft>
-                <a:spcPts val="700"/>
+                <a:spcPts val="800"/>
               </a:spcAft>
             </a:pPr>
             <a:r>
-              <a:rPr sz="2300" b="1" i="0">
+              <a:rPr sz="1700" b="0" i="0">
                 <a:solidFill>
-                  <a:srgbClr val="006E96"/>
+                  <a:srgbClr val="595959"/>
                 </a:solidFill>
                 <a:latin typeface="Arial"/>
               </a:rPr>
-              <a:t>Building your own EA tool is almost never right.</a:t>
-            </a:r>
-          </a:p>
-        </p:txBody>
-      </p:sp>
-      <p:sp>
-        <p:nvSpPr>
-          <p:cNvPr id="7" name="TextBox 6"/>
+              <a:t>In buying a tool to help your government avoid vendor lock-in, you can lock yourself into the tool.</a:t>
+            </a:r>
+          </a:p>
+        </p:txBody>
+      </p:sp>
+      <p:sp>
+        <p:nvSpPr>
+          <p:cNvPr id="5" name="TextBox 4"/>
           <p:cNvSpPr txBox="1"/>
           <p:nvPr/>
         </p:nvSpPr>
@@ -13243,6 +11947,41 @@
                 <a:latin typeface="Arial"/>
               </a:rPr>
               <a:t>3.2 · Choose EA tooling without locking yourself in</a:t>
+            </a:r>
+          </a:p>
+        </p:txBody>
+      </p:sp>
+      <p:sp>
+        <p:nvSpPr>
+          <p:cNvPr id="6" name="TextBox 5"/>
+          <p:cNvSpPr txBox="1"/>
+          <p:nvPr/>
+        </p:nvSpPr>
+        <p:spPr>
+          <a:xfrm>
+            <a:off x="10058400" y="6473952"/>
+            <a:ext cx="1673352" cy="292608"/>
+          </a:xfrm>
+          <a:prstGeom prst="rect">
+            <a:avLst/>
+          </a:prstGeom>
+          <a:noFill/>
+        </p:spPr>
+        <p:txBody>
+          <a:bodyPr wrap="square">
+            <a:spAutoFit/>
+          </a:bodyPr>
+          <a:lstStyle/>
+          <a:p>
+            <a:pPr algn="r"/>
+            <a:r>
+              <a:rPr sz="900" b="0" i="0">
+                <a:solidFill>
+                  <a:srgbClr val="595959"/>
+                </a:solidFill>
+                <a:latin typeface="Arial"/>
+              </a:rPr>
+              <a:t>www.itu.int</a:t>
             </a:r>
           </a:p>
         </p:txBody>
@@ -13338,84 +12077,27 @@
                 </a:solidFill>
                 <a:latin typeface="Arial"/>
               </a:rPr>
-              <a:t>One question decides whether you own your architecture, or the tool does</a:t>
-            </a:r>
-          </a:p>
-        </p:txBody>
-      </p:sp>
-      <p:sp>
-        <p:nvSpPr>
-          <p:cNvPr id="4" name="TextBox 3"/>
-          <p:cNvSpPr txBox="1"/>
+              <a:t>Graduate when the spreadsheet hurts in three specific ways</a:t>
+            </a:r>
+          </a:p>
+        </p:txBody>
+      </p:sp>
+      <p:sp>
+        <p:nvSpPr>
+          <p:cNvPr id="4" name="Oval 3"/>
+          <p:cNvSpPr/>
           <p:nvPr/>
         </p:nvSpPr>
         <p:spPr>
           <a:xfrm>
-            <a:off x="658368" y="1600200"/>
-            <a:ext cx="10881360" cy="2651760"/>
-          </a:xfrm>
-          <a:prstGeom prst="rect">
+            <a:off x="621792" y="1508760"/>
+            <a:ext cx="310896" cy="310896"/>
+          </a:xfrm>
+          <a:prstGeom prst="ellipse">
             <a:avLst/>
           </a:prstGeom>
-          <a:noFill/>
-        </p:spPr>
-        <p:txBody>
-          <a:bodyPr wrap="square">
-            <a:spAutoFit/>
-          </a:bodyPr>
-          <a:lstStyle/>
-          <a:p>
-            <a:pPr>
-              <a:spcAft>
-                <a:spcPts val="1200"/>
-              </a:spcAft>
-            </a:pPr>
-            <a:r>
-              <a:rPr sz="2000" b="0" i="0">
-                <a:solidFill>
-                  <a:srgbClr val="1A1A1A"/>
-                </a:solidFill>
-                <a:latin typeface="Arial"/>
-              </a:rPr>
-              <a:t>Before you adopt any tool, ask it: can I export everything, in a format I can read without this tool, whenever I want?</a:t>
-            </a:r>
-          </a:p>
-          <a:p>
-            <a:pPr>
-              <a:spcAft>
-                <a:spcPts val="1200"/>
-              </a:spcAft>
-            </a:pPr>
-            <a:r>
-              <a:rPr sz="2000" b="0" i="0">
-                <a:solidFill>
-                  <a:srgbClr val="1A1A1A"/>
-                </a:solidFill>
-                <a:latin typeface="Arial"/>
-              </a:rPr>
-              <a:t>If the answer is no, the tool owns your architecture, not you.</a:t>
-            </a:r>
-          </a:p>
-        </p:txBody>
-      </p:sp>
-      <p:sp>
-        <p:nvSpPr>
-          <p:cNvPr id="5" name="Rounded Rectangle 4"/>
-          <p:cNvSpPr/>
-          <p:nvPr/>
-        </p:nvSpPr>
-        <p:spPr>
-          <a:xfrm>
-            <a:off x="658368" y="4434840"/>
-            <a:ext cx="10881360" cy="1325880"/>
-          </a:xfrm>
-          <a:prstGeom prst="roundRect">
-            <a:avLst>
-              <a:gd name="adj" fmla="val 4500"/>
-            </a:avLst>
-          </a:prstGeom>
           <a:solidFill>
-            <a:srgbClr val="E5F5FB"/>
+            <a:srgbClr val="009CD6"/>
           </a:solidFill>
           <a:ln>
             <a:noFill/>
@@ -13437,23 +12119,32 @@
           </a:fontRef>
         </p:style>
         <p:txBody>
-          <a:bodyPr rtlCol="0" anchor="ctr"/>
+          <a:bodyPr rtlCol="0" anchor="ctr" lIns="0" rIns="0" tIns="0" bIns="0" wrap="square"/>
           <a:lstStyle/>
           <a:p>
             <a:pPr algn="ctr"/>
-          </a:p>
-        </p:txBody>
-      </p:sp>
-      <p:sp>
-        <p:nvSpPr>
-          <p:cNvPr id="6" name="TextBox 5"/>
+            <a:r>
+              <a:rPr sz="1300" b="1" i="0">
+                <a:solidFill>
+                  <a:srgbClr val="FFFFFF"/>
+                </a:solidFill>
+                <a:latin typeface="Arial"/>
+              </a:rPr>
+              <a:t>1</a:t>
+            </a:r>
+          </a:p>
+        </p:txBody>
+      </p:sp>
+      <p:sp>
+        <p:nvSpPr>
+          <p:cNvPr id="5" name="TextBox 4"/>
           <p:cNvSpPr txBox="1"/>
           <p:nvPr/>
         </p:nvSpPr>
         <p:spPr>
           <a:xfrm>
-            <a:off x="859536" y="4626864"/>
-            <a:ext cx="10479024" cy="1051560"/>
+            <a:off x="1115568" y="1463040"/>
+            <a:ext cx="10527487" cy="1386839"/>
           </a:xfrm>
           <a:prstGeom prst="rect">
             <a:avLst/>
@@ -13468,24 +12159,362 @@
           <a:p>
             <a:pPr>
               <a:spcAft>
-                <a:spcPts val="700"/>
+                <a:spcPts val="300"/>
               </a:spcAft>
             </a:pPr>
             <a:r>
-              <a:rPr sz="2300" b="1" i="0">
+              <a:rPr sz="1900" b="1" i="0">
+                <a:solidFill>
+                  <a:srgbClr val="1A1A1A"/>
+                </a:solidFill>
+                <a:latin typeface="Arial"/>
+              </a:rPr>
+              <a:t>You cannot see the relationships any more</a:t>
+            </a:r>
+          </a:p>
+          <a:p>
+            <a:pPr>
+              <a:spcAft>
+                <a:spcPts val="300"/>
+              </a:spcAft>
+            </a:pPr>
+            <a:r>
+              <a:rPr sz="1550" b="0" i="0">
+                <a:solidFill>
+                  <a:srgbClr val="595959"/>
+                </a:solidFill>
+                <a:latin typeface="Arial"/>
+              </a:rPr>
+              <a:t>They are scattered across tabs.</a:t>
+            </a:r>
+          </a:p>
+        </p:txBody>
+      </p:sp>
+      <p:sp>
+        <p:nvSpPr>
+          <p:cNvPr id="6" name="Rectangle 5"/>
+          <p:cNvSpPr/>
+          <p:nvPr/>
+        </p:nvSpPr>
+        <p:spPr>
+          <a:xfrm>
+            <a:off x="621792" y="2854452"/>
+            <a:ext cx="10881360" cy="12700"/>
+          </a:xfrm>
+          <a:prstGeom prst="rect">
+            <a:avLst/>
+          </a:prstGeom>
+          <a:solidFill>
+            <a:srgbClr val="DDECF4"/>
+          </a:solidFill>
+          <a:ln>
+            <a:noFill/>
+          </a:ln>
+          <a:effectLst/>
+        </p:spPr>
+        <p:style>
+          <a:lnRef idx="1">
+            <a:schemeClr val="accent1"/>
+          </a:lnRef>
+          <a:fillRef idx="3">
+            <a:schemeClr val="accent1"/>
+          </a:fillRef>
+          <a:effectRef idx="2">
+            <a:schemeClr val="accent1"/>
+          </a:effectRef>
+          <a:fontRef idx="minor">
+            <a:schemeClr val="lt1"/>
+          </a:fontRef>
+        </p:style>
+        <p:txBody>
+          <a:bodyPr rtlCol="0" anchor="ctr"/>
+          <a:lstStyle/>
+          <a:p>
+            <a:pPr algn="ctr"/>
+          </a:p>
+        </p:txBody>
+      </p:sp>
+      <p:sp>
+        <p:nvSpPr>
+          <p:cNvPr id="7" name="Oval 6"/>
+          <p:cNvSpPr/>
+          <p:nvPr/>
+        </p:nvSpPr>
+        <p:spPr>
+          <a:xfrm>
+            <a:off x="621792" y="2941319"/>
+            <a:ext cx="310896" cy="310896"/>
+          </a:xfrm>
+          <a:prstGeom prst="ellipse">
+            <a:avLst/>
+          </a:prstGeom>
+          <a:solidFill>
+            <a:srgbClr val="009CD6"/>
+          </a:solidFill>
+          <a:ln>
+            <a:noFill/>
+          </a:ln>
+          <a:effectLst/>
+        </p:spPr>
+        <p:style>
+          <a:lnRef idx="1">
+            <a:schemeClr val="accent1"/>
+          </a:lnRef>
+          <a:fillRef idx="3">
+            <a:schemeClr val="accent1"/>
+          </a:fillRef>
+          <a:effectRef idx="2">
+            <a:schemeClr val="accent1"/>
+          </a:effectRef>
+          <a:fontRef idx="minor">
+            <a:schemeClr val="lt1"/>
+          </a:fontRef>
+        </p:style>
+        <p:txBody>
+          <a:bodyPr rtlCol="0" anchor="ctr" lIns="0" rIns="0" tIns="0" bIns="0" wrap="square"/>
+          <a:lstStyle/>
+          <a:p>
+            <a:pPr algn="ctr"/>
+            <a:r>
+              <a:rPr sz="1300" b="1" i="0">
+                <a:solidFill>
+                  <a:srgbClr val="FFFFFF"/>
+                </a:solidFill>
+                <a:latin typeface="Arial"/>
+              </a:rPr>
+              <a:t>2</a:t>
+            </a:r>
+          </a:p>
+        </p:txBody>
+      </p:sp>
+      <p:sp>
+        <p:nvSpPr>
+          <p:cNvPr id="8" name="TextBox 7"/>
+          <p:cNvSpPr txBox="1"/>
+          <p:nvPr/>
+        </p:nvSpPr>
+        <p:spPr>
+          <a:xfrm>
+            <a:off x="1115568" y="2895600"/>
+            <a:ext cx="10527487" cy="1386839"/>
+          </a:xfrm>
+          <a:prstGeom prst="rect">
+            <a:avLst/>
+          </a:prstGeom>
+          <a:noFill/>
+        </p:spPr>
+        <p:txBody>
+          <a:bodyPr wrap="square">
+            <a:spAutoFit/>
+          </a:bodyPr>
+          <a:lstStyle/>
+          <a:p>
+            <a:pPr>
+              <a:spcAft>
+                <a:spcPts val="300"/>
+              </a:spcAft>
+            </a:pPr>
+            <a:r>
+              <a:rPr sz="1900" b="1" i="0">
+                <a:solidFill>
+                  <a:srgbClr val="1A1A1A"/>
+                </a:solidFill>
+                <a:latin typeface="Arial"/>
+              </a:rPr>
+              <a:t>Several people edit, and their changes collide</a:t>
+            </a:r>
+          </a:p>
+        </p:txBody>
+      </p:sp>
+      <p:sp>
+        <p:nvSpPr>
+          <p:cNvPr id="9" name="Rectangle 8"/>
+          <p:cNvSpPr/>
+          <p:nvPr/>
+        </p:nvSpPr>
+        <p:spPr>
+          <a:xfrm>
+            <a:off x="621792" y="4287011"/>
+            <a:ext cx="10881360" cy="12700"/>
+          </a:xfrm>
+          <a:prstGeom prst="rect">
+            <a:avLst/>
+          </a:prstGeom>
+          <a:solidFill>
+            <a:srgbClr val="DDECF4"/>
+          </a:solidFill>
+          <a:ln>
+            <a:noFill/>
+          </a:ln>
+          <a:effectLst/>
+        </p:spPr>
+        <p:style>
+          <a:lnRef idx="1">
+            <a:schemeClr val="accent1"/>
+          </a:lnRef>
+          <a:fillRef idx="3">
+            <a:schemeClr val="accent1"/>
+          </a:fillRef>
+          <a:effectRef idx="2">
+            <a:schemeClr val="accent1"/>
+          </a:effectRef>
+          <a:fontRef idx="minor">
+            <a:schemeClr val="lt1"/>
+          </a:fontRef>
+        </p:style>
+        <p:txBody>
+          <a:bodyPr rtlCol="0" anchor="ctr"/>
+          <a:lstStyle/>
+          <a:p>
+            <a:pPr algn="ctr"/>
+          </a:p>
+        </p:txBody>
+      </p:sp>
+      <p:sp>
+        <p:nvSpPr>
+          <p:cNvPr id="10" name="Oval 9"/>
+          <p:cNvSpPr/>
+          <p:nvPr/>
+        </p:nvSpPr>
+        <p:spPr>
+          <a:xfrm>
+            <a:off x="621792" y="4373879"/>
+            <a:ext cx="310896" cy="310896"/>
+          </a:xfrm>
+          <a:prstGeom prst="ellipse">
+            <a:avLst/>
+          </a:prstGeom>
+          <a:solidFill>
+            <a:srgbClr val="009CD6"/>
+          </a:solidFill>
+          <a:ln>
+            <a:noFill/>
+          </a:ln>
+          <a:effectLst/>
+        </p:spPr>
+        <p:style>
+          <a:lnRef idx="1">
+            <a:schemeClr val="accent1"/>
+          </a:lnRef>
+          <a:fillRef idx="3">
+            <a:schemeClr val="accent1"/>
+          </a:fillRef>
+          <a:effectRef idx="2">
+            <a:schemeClr val="accent1"/>
+          </a:effectRef>
+          <a:fontRef idx="minor">
+            <a:schemeClr val="lt1"/>
+          </a:fontRef>
+        </p:style>
+        <p:txBody>
+          <a:bodyPr rtlCol="0" anchor="ctr" lIns="0" rIns="0" tIns="0" bIns="0" wrap="square"/>
+          <a:lstStyle/>
+          <a:p>
+            <a:pPr algn="ctr"/>
+            <a:r>
+              <a:rPr sz="1300" b="1" i="0">
+                <a:solidFill>
+                  <a:srgbClr val="FFFFFF"/>
+                </a:solidFill>
+                <a:latin typeface="Arial"/>
+              </a:rPr>
+              <a:t>3</a:t>
+            </a:r>
+          </a:p>
+        </p:txBody>
+      </p:sp>
+      <p:sp>
+        <p:nvSpPr>
+          <p:cNvPr id="11" name="TextBox 10"/>
+          <p:cNvSpPr txBox="1"/>
+          <p:nvPr/>
+        </p:nvSpPr>
+        <p:spPr>
+          <a:xfrm>
+            <a:off x="1115568" y="4328159"/>
+            <a:ext cx="10527487" cy="1386839"/>
+          </a:xfrm>
+          <a:prstGeom prst="rect">
+            <a:avLst/>
+          </a:prstGeom>
+          <a:noFill/>
+        </p:spPr>
+        <p:txBody>
+          <a:bodyPr wrap="square">
+            <a:spAutoFit/>
+          </a:bodyPr>
+          <a:lstStyle/>
+          <a:p>
+            <a:pPr>
+              <a:spcAft>
+                <a:spcPts val="300"/>
+              </a:spcAft>
+            </a:pPr>
+            <a:r>
+              <a:rPr sz="1900" b="1" i="0">
+                <a:solidFill>
+                  <a:srgbClr val="1A1A1A"/>
+                </a:solidFill>
+                <a:latin typeface="Arial"/>
+              </a:rPr>
+              <a:t>A simple cross-layer question costs an afternoon</a:t>
+            </a:r>
+          </a:p>
+          <a:p>
+            <a:pPr>
+              <a:spcAft>
+                <a:spcPts val="300"/>
+              </a:spcAft>
+            </a:pPr>
+            <a:r>
+              <a:rPr sz="1550" b="0" i="0">
+                <a:solidFill>
+                  <a:srgbClr val="595959"/>
+                </a:solidFill>
+                <a:latin typeface="Arial"/>
+              </a:rPr>
+              <a:t>Which systems touch the Person domain?</a:t>
+            </a:r>
+          </a:p>
+        </p:txBody>
+      </p:sp>
+      <p:sp>
+        <p:nvSpPr>
+          <p:cNvPr id="12" name="TextBox 11"/>
+          <p:cNvSpPr txBox="1"/>
+          <p:nvPr/>
+        </p:nvSpPr>
+        <p:spPr>
+          <a:xfrm>
+            <a:off x="658368" y="5870448"/>
+            <a:ext cx="10881360" cy="548640"/>
+          </a:xfrm>
+          <a:prstGeom prst="rect">
+            <a:avLst/>
+          </a:prstGeom>
+          <a:noFill/>
+        </p:spPr>
+        <p:txBody>
+          <a:bodyPr wrap="square">
+            <a:spAutoFit/>
+          </a:bodyPr>
+          <a:lstStyle/>
+          <a:p>
+            <a:r>
+              <a:rPr sz="1550" b="1" i="0">
                 <a:solidFill>
                   <a:srgbClr val="006E96"/>
                 </a:solidFill>
                 <a:latin typeface="Arial"/>
               </a:rPr>
-              <a:t>The content is the asset; the tool is only a viewer.</a:t>
-            </a:r>
-          </a:p>
-        </p:txBody>
-      </p:sp>
-      <p:sp>
-        <p:nvSpPr>
-          <p:cNvPr id="7" name="TextBox 6"/>
+              <a:t>Then graduate — not before. A heavy tool bought early is an empty, expensive database.</a:t>
+            </a:r>
+          </a:p>
+        </p:txBody>
+      </p:sp>
+      <p:sp>
+        <p:nvSpPr>
+          <p:cNvPr id="13" name="TextBox 12"/>
           <p:cNvSpPr txBox="1"/>
           <p:nvPr/>
         </p:nvSpPr>
@@ -13608,7 +12637,7 @@
                 </a:solidFill>
                 <a:latin typeface="Arial"/>
               </a:rPr>
-              <a:t>Bend the tool to your metamodel, never the metamodel to the tool</a:t>
+              <a:t>The rule you enforce on every ministry applies to your own tool too</a:t>
             </a:r>
           </a:p>
         </p:txBody>
@@ -13647,23 +12676,7 @@
                 </a:solidFill>
                 <a:latin typeface="Arial"/>
               </a:rPr>
-              <a:t>Every EA tool ships with its own built-in way of organising things — its own metamodel. The mistake is to let the tool’s model quietly replace the one you adopted.</a:t>
-            </a:r>
-          </a:p>
-          <a:p>
-            <a:pPr>
-              <a:spcAft>
-                <a:spcPts val="1200"/>
-              </a:spcAft>
-            </a:pPr>
-            <a:r>
-              <a:rPr sz="2000" b="0" i="0">
-                <a:solidFill>
-                  <a:srgbClr val="1A1A1A"/>
-                </a:solidFill>
-                <a:latin typeface="Arial"/>
-              </a:rPr>
-              <a:t>You bend the tool to fit your entities and your principles — not the other way around.</a:t>
+              <a:t>Reuse before buy, buy before build. Is there already a shared tooling platform your government runs that you can use? Is there an open-source EA tool that fits? Only then a bought product.</a:t>
             </a:r>
           </a:p>
         </p:txBody>
@@ -13748,7 +12761,7 @@
                 </a:solidFill>
                 <a:latin typeface="Arial"/>
               </a:rPr>
-              <a:t>If a tool cannot represent your metamodel, question the tool.</a:t>
+              <a:t>Building your own EA tool is almost never right.</a:t>
             </a:r>
           </a:p>
         </p:txBody>
@@ -13807,6 +12820,546 @@
       <p:grpSpPr/>
       <p:sp>
         <p:nvSpPr>
+          <p:cNvPr id="2" name="Rectangle 1"/>
+          <p:cNvSpPr/>
+          <p:nvPr/>
+        </p:nvSpPr>
+        <p:spPr>
+          <a:xfrm>
+            <a:off x="457200" y="384048"/>
+            <a:ext cx="45720" cy="256032"/>
+          </a:xfrm>
+          <a:prstGeom prst="rect">
+            <a:avLst/>
+          </a:prstGeom>
+          <a:solidFill>
+            <a:srgbClr val="009CD6"/>
+          </a:solidFill>
+          <a:ln>
+            <a:noFill/>
+          </a:ln>
+          <a:effectLst/>
+        </p:spPr>
+        <p:style>
+          <a:lnRef idx="1">
+            <a:schemeClr val="accent1"/>
+          </a:lnRef>
+          <a:fillRef idx="3">
+            <a:schemeClr val="accent1"/>
+          </a:fillRef>
+          <a:effectRef idx="2">
+            <a:schemeClr val="accent1"/>
+          </a:effectRef>
+          <a:fontRef idx="minor">
+            <a:schemeClr val="lt1"/>
+          </a:fontRef>
+        </p:style>
+        <p:txBody>
+          <a:bodyPr rtlCol="0" anchor="ctr"/>
+          <a:lstStyle/>
+          <a:p>
+            <a:pPr algn="ctr"/>
+          </a:p>
+        </p:txBody>
+      </p:sp>
+      <p:sp>
+        <p:nvSpPr>
+          <p:cNvPr id="3" name="TextBox 2"/>
+          <p:cNvSpPr txBox="1"/>
+          <p:nvPr/>
+        </p:nvSpPr>
+        <p:spPr>
+          <a:xfrm>
+            <a:off x="621792" y="274320"/>
+            <a:ext cx="11247120" cy="914400"/>
+          </a:xfrm>
+          <a:prstGeom prst="rect">
+            <a:avLst/>
+          </a:prstGeom>
+          <a:noFill/>
+        </p:spPr>
+        <p:txBody>
+          <a:bodyPr wrap="square">
+            <a:spAutoFit/>
+          </a:bodyPr>
+          <a:lstStyle/>
+          <a:p>
+            <a:r>
+              <a:rPr sz="2800" b="1" i="0">
+                <a:solidFill>
+                  <a:srgbClr val="1A1A1A"/>
+                </a:solidFill>
+                <a:latin typeface="Arial"/>
+              </a:rPr>
+              <a:t>One question decides whether you own your architecture, or the tool does</a:t>
+            </a:r>
+          </a:p>
+        </p:txBody>
+      </p:sp>
+      <p:sp>
+        <p:nvSpPr>
+          <p:cNvPr id="4" name="TextBox 3"/>
+          <p:cNvSpPr txBox="1"/>
+          <p:nvPr/>
+        </p:nvSpPr>
+        <p:spPr>
+          <a:xfrm>
+            <a:off x="658368" y="1600200"/>
+            <a:ext cx="10881360" cy="2651760"/>
+          </a:xfrm>
+          <a:prstGeom prst="rect">
+            <a:avLst/>
+          </a:prstGeom>
+          <a:noFill/>
+        </p:spPr>
+        <p:txBody>
+          <a:bodyPr wrap="square">
+            <a:spAutoFit/>
+          </a:bodyPr>
+          <a:lstStyle/>
+          <a:p>
+            <a:pPr>
+              <a:spcAft>
+                <a:spcPts val="1200"/>
+              </a:spcAft>
+            </a:pPr>
+            <a:r>
+              <a:rPr sz="2000" b="0" i="0">
+                <a:solidFill>
+                  <a:srgbClr val="1A1A1A"/>
+                </a:solidFill>
+                <a:latin typeface="Arial"/>
+              </a:rPr>
+              <a:t>Before you adopt any tool, ask it: can I export everything, in a format I can read without this tool, whenever I want?</a:t>
+            </a:r>
+          </a:p>
+          <a:p>
+            <a:pPr>
+              <a:spcAft>
+                <a:spcPts val="1200"/>
+              </a:spcAft>
+            </a:pPr>
+            <a:r>
+              <a:rPr sz="2000" b="0" i="0">
+                <a:solidFill>
+                  <a:srgbClr val="1A1A1A"/>
+                </a:solidFill>
+                <a:latin typeface="Arial"/>
+              </a:rPr>
+              <a:t>If the answer is no, the tool owns your architecture, not you.</a:t>
+            </a:r>
+          </a:p>
+        </p:txBody>
+      </p:sp>
+      <p:sp>
+        <p:nvSpPr>
+          <p:cNvPr id="5" name="Rounded Rectangle 4"/>
+          <p:cNvSpPr/>
+          <p:nvPr/>
+        </p:nvSpPr>
+        <p:spPr>
+          <a:xfrm>
+            <a:off x="658368" y="4434840"/>
+            <a:ext cx="10881360" cy="1325880"/>
+          </a:xfrm>
+          <a:prstGeom prst="roundRect">
+            <a:avLst>
+              <a:gd name="adj" fmla="val 4500"/>
+            </a:avLst>
+          </a:prstGeom>
+          <a:solidFill>
+            <a:srgbClr val="E5F5FB"/>
+          </a:solidFill>
+          <a:ln>
+            <a:noFill/>
+          </a:ln>
+          <a:effectLst/>
+        </p:spPr>
+        <p:style>
+          <a:lnRef idx="1">
+            <a:schemeClr val="accent1"/>
+          </a:lnRef>
+          <a:fillRef idx="3">
+            <a:schemeClr val="accent1"/>
+          </a:fillRef>
+          <a:effectRef idx="2">
+            <a:schemeClr val="accent1"/>
+          </a:effectRef>
+          <a:fontRef idx="minor">
+            <a:schemeClr val="lt1"/>
+          </a:fontRef>
+        </p:style>
+        <p:txBody>
+          <a:bodyPr rtlCol="0" anchor="ctr"/>
+          <a:lstStyle/>
+          <a:p>
+            <a:pPr algn="ctr"/>
+          </a:p>
+        </p:txBody>
+      </p:sp>
+      <p:sp>
+        <p:nvSpPr>
+          <p:cNvPr id="6" name="TextBox 5"/>
+          <p:cNvSpPr txBox="1"/>
+          <p:nvPr/>
+        </p:nvSpPr>
+        <p:spPr>
+          <a:xfrm>
+            <a:off x="859536" y="4626864"/>
+            <a:ext cx="10479024" cy="1051560"/>
+          </a:xfrm>
+          <a:prstGeom prst="rect">
+            <a:avLst/>
+          </a:prstGeom>
+          <a:noFill/>
+        </p:spPr>
+        <p:txBody>
+          <a:bodyPr wrap="square">
+            <a:spAutoFit/>
+          </a:bodyPr>
+          <a:lstStyle/>
+          <a:p>
+            <a:pPr>
+              <a:spcAft>
+                <a:spcPts val="700"/>
+              </a:spcAft>
+            </a:pPr>
+            <a:r>
+              <a:rPr sz="2300" b="1" i="0">
+                <a:solidFill>
+                  <a:srgbClr val="006E96"/>
+                </a:solidFill>
+                <a:latin typeface="Arial"/>
+              </a:rPr>
+              <a:t>The content is the asset; the tool is only a viewer.</a:t>
+            </a:r>
+          </a:p>
+        </p:txBody>
+      </p:sp>
+      <p:sp>
+        <p:nvSpPr>
+          <p:cNvPr id="7" name="TextBox 6"/>
+          <p:cNvSpPr txBox="1"/>
+          <p:nvPr/>
+        </p:nvSpPr>
+        <p:spPr>
+          <a:xfrm>
+            <a:off x="457200" y="6473952"/>
+            <a:ext cx="7772400" cy="292608"/>
+          </a:xfrm>
+          <a:prstGeom prst="rect">
+            <a:avLst/>
+          </a:prstGeom>
+          <a:noFill/>
+        </p:spPr>
+        <p:txBody>
+          <a:bodyPr wrap="square">
+            <a:spAutoFit/>
+          </a:bodyPr>
+          <a:lstStyle/>
+          <a:p>
+            <a:r>
+              <a:rPr sz="900" b="0" i="0">
+                <a:solidFill>
+                  <a:srgbClr val="595959"/>
+                </a:solidFill>
+                <a:latin typeface="Arial"/>
+              </a:rPr>
+              <a:t>3.2 · Choose EA tooling without locking yourself in</a:t>
+            </a:r>
+          </a:p>
+        </p:txBody>
+      </p:sp>
+    </p:spTree>
+  </p:cSld>
+  <p:clrMapOvr>
+    <a:masterClrMapping/>
+  </p:clrMapOvr>
+</p:sld>
+</file>
+
+<file path=ppt/slides/slide17.xml><?xml version="1.0" encoding="utf-8"?>
+<p:sld xmlns:a="http://schemas.openxmlformats.org/drawingml/2006/main" xmlns:p="http://schemas.openxmlformats.org/presentationml/2006/main" xmlns:r="http://schemas.openxmlformats.org/officeDocument/2006/relationships">
+  <p:cSld>
+    <p:spTree>
+      <p:nvGrpSpPr>
+        <p:cNvPr id="1" name=""/>
+        <p:cNvGrpSpPr/>
+        <p:nvPr/>
+      </p:nvGrpSpPr>
+      <p:grpSpPr/>
+      <p:sp>
+        <p:nvSpPr>
+          <p:cNvPr id="2" name="Rectangle 1"/>
+          <p:cNvSpPr/>
+          <p:nvPr/>
+        </p:nvSpPr>
+        <p:spPr>
+          <a:xfrm>
+            <a:off x="457200" y="384048"/>
+            <a:ext cx="45720" cy="256032"/>
+          </a:xfrm>
+          <a:prstGeom prst="rect">
+            <a:avLst/>
+          </a:prstGeom>
+          <a:solidFill>
+            <a:srgbClr val="009CD6"/>
+          </a:solidFill>
+          <a:ln>
+            <a:noFill/>
+          </a:ln>
+          <a:effectLst/>
+        </p:spPr>
+        <p:style>
+          <a:lnRef idx="1">
+            <a:schemeClr val="accent1"/>
+          </a:lnRef>
+          <a:fillRef idx="3">
+            <a:schemeClr val="accent1"/>
+          </a:fillRef>
+          <a:effectRef idx="2">
+            <a:schemeClr val="accent1"/>
+          </a:effectRef>
+          <a:fontRef idx="minor">
+            <a:schemeClr val="lt1"/>
+          </a:fontRef>
+        </p:style>
+        <p:txBody>
+          <a:bodyPr rtlCol="0" anchor="ctr"/>
+          <a:lstStyle/>
+          <a:p>
+            <a:pPr algn="ctr"/>
+          </a:p>
+        </p:txBody>
+      </p:sp>
+      <p:sp>
+        <p:nvSpPr>
+          <p:cNvPr id="3" name="TextBox 2"/>
+          <p:cNvSpPr txBox="1"/>
+          <p:nvPr/>
+        </p:nvSpPr>
+        <p:spPr>
+          <a:xfrm>
+            <a:off x="621792" y="274320"/>
+            <a:ext cx="11247120" cy="914400"/>
+          </a:xfrm>
+          <a:prstGeom prst="rect">
+            <a:avLst/>
+          </a:prstGeom>
+          <a:noFill/>
+        </p:spPr>
+        <p:txBody>
+          <a:bodyPr wrap="square">
+            <a:spAutoFit/>
+          </a:bodyPr>
+          <a:lstStyle/>
+          <a:p>
+            <a:r>
+              <a:rPr sz="2800" b="1" i="0">
+                <a:solidFill>
+                  <a:srgbClr val="1A1A1A"/>
+                </a:solidFill>
+                <a:latin typeface="Arial"/>
+              </a:rPr>
+              <a:t>Bend the tool to your metamodel, never the metamodel to the tool</a:t>
+            </a:r>
+          </a:p>
+        </p:txBody>
+      </p:sp>
+      <p:sp>
+        <p:nvSpPr>
+          <p:cNvPr id="4" name="TextBox 3"/>
+          <p:cNvSpPr txBox="1"/>
+          <p:nvPr/>
+        </p:nvSpPr>
+        <p:spPr>
+          <a:xfrm>
+            <a:off x="658368" y="1600200"/>
+            <a:ext cx="10881360" cy="2651760"/>
+          </a:xfrm>
+          <a:prstGeom prst="rect">
+            <a:avLst/>
+          </a:prstGeom>
+          <a:noFill/>
+        </p:spPr>
+        <p:txBody>
+          <a:bodyPr wrap="square">
+            <a:spAutoFit/>
+          </a:bodyPr>
+          <a:lstStyle/>
+          <a:p>
+            <a:pPr>
+              <a:spcAft>
+                <a:spcPts val="1200"/>
+              </a:spcAft>
+            </a:pPr>
+            <a:r>
+              <a:rPr sz="2000" b="0" i="0">
+                <a:solidFill>
+                  <a:srgbClr val="1A1A1A"/>
+                </a:solidFill>
+                <a:latin typeface="Arial"/>
+              </a:rPr>
+              <a:t>Every EA tool ships with its own built-in way of organising things — its own metamodel. The mistake is to let the tool’s model quietly replace the one you adopted.</a:t>
+            </a:r>
+          </a:p>
+          <a:p>
+            <a:pPr>
+              <a:spcAft>
+                <a:spcPts val="1200"/>
+              </a:spcAft>
+            </a:pPr>
+            <a:r>
+              <a:rPr sz="2000" b="0" i="0">
+                <a:solidFill>
+                  <a:srgbClr val="1A1A1A"/>
+                </a:solidFill>
+                <a:latin typeface="Arial"/>
+              </a:rPr>
+              <a:t>You bend the tool to fit your entities and your principles — not the other way around.</a:t>
+            </a:r>
+          </a:p>
+        </p:txBody>
+      </p:sp>
+      <p:sp>
+        <p:nvSpPr>
+          <p:cNvPr id="5" name="Rounded Rectangle 4"/>
+          <p:cNvSpPr/>
+          <p:nvPr/>
+        </p:nvSpPr>
+        <p:spPr>
+          <a:xfrm>
+            <a:off x="658368" y="4434840"/>
+            <a:ext cx="10881360" cy="1325880"/>
+          </a:xfrm>
+          <a:prstGeom prst="roundRect">
+            <a:avLst>
+              <a:gd name="adj" fmla="val 4500"/>
+            </a:avLst>
+          </a:prstGeom>
+          <a:solidFill>
+            <a:srgbClr val="E5F5FB"/>
+          </a:solidFill>
+          <a:ln>
+            <a:noFill/>
+          </a:ln>
+          <a:effectLst/>
+        </p:spPr>
+        <p:style>
+          <a:lnRef idx="1">
+            <a:schemeClr val="accent1"/>
+          </a:lnRef>
+          <a:fillRef idx="3">
+            <a:schemeClr val="accent1"/>
+          </a:fillRef>
+          <a:effectRef idx="2">
+            <a:schemeClr val="accent1"/>
+          </a:effectRef>
+          <a:fontRef idx="minor">
+            <a:schemeClr val="lt1"/>
+          </a:fontRef>
+        </p:style>
+        <p:txBody>
+          <a:bodyPr rtlCol="0" anchor="ctr"/>
+          <a:lstStyle/>
+          <a:p>
+            <a:pPr algn="ctr"/>
+          </a:p>
+        </p:txBody>
+      </p:sp>
+      <p:sp>
+        <p:nvSpPr>
+          <p:cNvPr id="6" name="TextBox 5"/>
+          <p:cNvSpPr txBox="1"/>
+          <p:nvPr/>
+        </p:nvSpPr>
+        <p:spPr>
+          <a:xfrm>
+            <a:off x="859536" y="4626864"/>
+            <a:ext cx="10479024" cy="1051560"/>
+          </a:xfrm>
+          <a:prstGeom prst="rect">
+            <a:avLst/>
+          </a:prstGeom>
+          <a:noFill/>
+        </p:spPr>
+        <p:txBody>
+          <a:bodyPr wrap="square">
+            <a:spAutoFit/>
+          </a:bodyPr>
+          <a:lstStyle/>
+          <a:p>
+            <a:pPr>
+              <a:spcAft>
+                <a:spcPts val="700"/>
+              </a:spcAft>
+            </a:pPr>
+            <a:r>
+              <a:rPr sz="2300" b="1" i="0">
+                <a:solidFill>
+                  <a:srgbClr val="006E96"/>
+                </a:solidFill>
+                <a:latin typeface="Arial"/>
+              </a:rPr>
+              <a:t>If a tool cannot represent your metamodel, question the tool.</a:t>
+            </a:r>
+          </a:p>
+        </p:txBody>
+      </p:sp>
+      <p:sp>
+        <p:nvSpPr>
+          <p:cNvPr id="7" name="TextBox 6"/>
+          <p:cNvSpPr txBox="1"/>
+          <p:nvPr/>
+        </p:nvSpPr>
+        <p:spPr>
+          <a:xfrm>
+            <a:off x="457200" y="6473952"/>
+            <a:ext cx="7772400" cy="292608"/>
+          </a:xfrm>
+          <a:prstGeom prst="rect">
+            <a:avLst/>
+          </a:prstGeom>
+          <a:noFill/>
+        </p:spPr>
+        <p:txBody>
+          <a:bodyPr wrap="square">
+            <a:spAutoFit/>
+          </a:bodyPr>
+          <a:lstStyle/>
+          <a:p>
+            <a:r>
+              <a:rPr sz="900" b="0" i="0">
+                <a:solidFill>
+                  <a:srgbClr val="595959"/>
+                </a:solidFill>
+                <a:latin typeface="Arial"/>
+              </a:rPr>
+              <a:t>3.2 · Choose EA tooling without locking yourself in</a:t>
+            </a:r>
+          </a:p>
+        </p:txBody>
+      </p:sp>
+    </p:spTree>
+  </p:cSld>
+  <p:clrMapOvr>
+    <a:masterClrMapping/>
+  </p:clrMapOvr>
+</p:sld>
+</file>
+
+<file path=ppt/slides/slide18.xml><?xml version="1.0" encoding="utf-8"?>
+<p:sld xmlns:a="http://schemas.openxmlformats.org/drawingml/2006/main" xmlns:p="http://schemas.openxmlformats.org/presentationml/2006/main" xmlns:r="http://schemas.openxmlformats.org/officeDocument/2006/relationships">
+  <p:cSld>
+    <p:spTree>
+      <p:nvGrpSpPr>
+        <p:cNvPr id="1" name=""/>
+        <p:cNvGrpSpPr/>
+        <p:nvPr/>
+      </p:nvGrpSpPr>
+      <p:grpSpPr/>
+      <p:sp>
+        <p:nvSpPr>
           <p:cNvPr id="2" name="TextBox 1"/>
           <p:cNvSpPr txBox="1"/>
           <p:nvPr/>
@@ -14038,7 +13591,7 @@
 </p:sld>
 </file>
 
-<file path=ppt/slides/slide17.xml><?xml version="1.0" encoding="utf-8"?>
+<file path=ppt/slides/slide19.xml><?xml version="1.0" encoding="utf-8"?>
 <p:sld xmlns:a="http://schemas.openxmlformats.org/drawingml/2006/main" xmlns:p="http://schemas.openxmlformats.org/presentationml/2006/main" xmlns:r="http://schemas.openxmlformats.org/officeDocument/2006/relationships">
   <p:cSld>
     <p:spTree>

--- a/10-Knowledge-Products/KP1-GEA/videos/module_3/en/decks/KP1_M3_3.2_Deck_v0.2.pptx
+++ b/10-Knowledge-Products/KP1-GEA/videos/module_3/en/decks/KP1_M3_3.2_Deck_v0.2.pptx
@@ -11771,7 +11771,7 @@
                 </a:solidFill>
                 <a:latin typeface="Arial"/>
               </a:rPr>
-              <a:t>~4 minutes · standalone video · voice-over on text slides</a:t>
+              <a:t>standalone video · voice-over on text slides</a:t>
             </a:r>
           </a:p>
         </p:txBody>

--- a/10-Knowledge-Products/KP1-GEA/videos/module_3/en/decks/KP1_M3_3.2_Deck_v0.2.pptx
+++ b/10-Knowledge-Products/KP1-GEA/videos/module_3/en/decks/KP1_M3_3.2_Deck_v0.2.pptx
@@ -11635,7 +11635,7 @@
                 </a:solidFill>
                 <a:latin typeface="Arial"/>
               </a:rPr>
-              <a:t>KP1 · MODULE 3 · VIDEO 3.2</a:t>
+              <a:t>MODULE 3 · VIDEO 3.2</a:t>
             </a:r>
           </a:p>
         </p:txBody>
